--- a/mlp/Healthcare_Fraud_Detection.pptx
+++ b/mlp/Healthcare_Fraud_Detection.pptx
@@ -4,6 +4,9 @@
   <p:sldMasterIdLst>
     <p:sldMasterId id="2147483648" r:id="rId1"/>
   </p:sldMasterIdLst>
+  <p:notesMasterIdLst>
+    <p:notesMasterId r:id="rId13"/>
+  </p:notesMasterIdLst>
   <p:sldIdLst>
     <p:sldId id="256" r:id="rId2"/>
     <p:sldId id="257" r:id="rId3"/>
@@ -17,10 +20,7 @@
     <p:sldId id="265" r:id="rId11"/>
     <p:sldId id="266" r:id="rId12"/>
   </p:sldIdLst>
-  <p:notesMasterIdLst>
-    <p:notesMasterId r:id="rId13"/>
-  </p:notesMasterIdLst>
-  <p:sldSz cx="9144000" cy="5143500"/>
+  <p:sldSz cx="9144000" cy="5143500" type="screen16x9"/>
   <p:notesSz cx="5143500" cy="9144000"/>
   <p:defaultTextStyle>
     <a:lvl1pPr marL="0" algn="l" defTabSz="914400" rtl="0" eaLnBrk="1" latinLnBrk="0" hangingPunct="1">
@@ -114,6 +114,11 @@
       </a:defRPr>
     </a:lvl9pPr>
   </p:defaultTextStyle>
+  <p:extLst>
+    <p:ext uri="{EFAFB233-063F-42B5-8137-9DF3F51BA10A}">
+      <p15:sldGuideLst xmlns:p15="http://schemas.microsoft.com/office/powerpoint/2012/main"/>
+    </p:ext>
+  </p:extLst>
 </p:presentation>
 </file>
 
@@ -139,234 +144,10 @@
           <a:chExt cx="0" cy="0"/>
         </a:xfrm>
       </p:grpSpPr>
-      <p:sp>
-        <p:nvSpPr>
-          <p:cNvPr id="2" name="Header Placeholder 1"/>
-          <p:cNvSpPr>
-            <a:spLocks noGrp="1"/>
-          </p:cNvSpPr>
-          <p:nvPr>
-            <p:ph type="hdr" sz="quarter"/>
-          </p:nvPr>
-        </p:nvSpPr>
-        <p:spPr>
-          <a:xfrm>
-            <a:off x="0" y="0"/>
-            <a:ext cx="2971800" cy="458788"/>
-          </a:xfrm>
-          <a:prstGeom prst="rect">
-            <a:avLst/>
-          </a:prstGeom>
-        </p:spPr>
-        <p:txBody>
-          <a:bodyPr vert="horz" lIns="91440" tIns="45720" rIns="91440" bIns="45720" rtlCol="0"/>
-          <a:lstStyle>
-            <a:lvl1pPr algn="l">
-              <a:defRPr sz="1200"/>
-            </a:lvl1pPr>
-          </a:lstStyle>
-          <a:p>
-            <a:endParaRPr lang="en-US"/>
-          </a:p>
-        </p:txBody>
-      </p:sp>
-      <p:sp>
-        <p:nvSpPr>
-          <p:cNvPr id="3" name="Date Placeholder 2"/>
-          <p:cNvSpPr>
-            <a:spLocks noGrp="1"/>
-          </p:cNvSpPr>
-          <p:nvPr>
-            <p:ph type="dt" idx="1"/>
-          </p:nvPr>
-        </p:nvSpPr>
-        <p:spPr>
-          <a:xfrm>
-            <a:off x="3884613" y="0"/>
-            <a:ext cx="2971800" cy="458788"/>
-          </a:xfrm>
-          <a:prstGeom prst="rect">
-            <a:avLst/>
-          </a:prstGeom>
-        </p:spPr>
-        <p:txBody>
-          <a:bodyPr vert="horz" lIns="91440" tIns="45720" rIns="91440" bIns="45720" rtlCol="0"/>
-          <a:lstStyle>
-            <a:lvl1pPr algn="r">
-              <a:defRPr sz="1200"/>
-            </a:lvl1pPr>
-          </a:lstStyle>
-          <a:p>
-            <a:fld id="{5282F153-3F37-0F45-9E97-73ACFA13230C}" type="datetimeFigureOut">
-              <a:rPr lang="en-US"/>
-              <a:t>7/23/19</a:t>
-            </a:fld>
-            <a:endParaRPr lang="en-US"/>
-          </a:p>
-        </p:txBody>
-      </p:sp>
-      <p:sp>
-        <p:nvSpPr>
-          <p:cNvPr id="4" name="Slide Image Placeholder 3"/>
-          <p:cNvSpPr>
-            <a:spLocks noGrp="1" noRot="1" noChangeAspect="1"/>
-          </p:cNvSpPr>
-          <p:nvPr>
-            <p:ph type="sldImg" idx="2"/>
-          </p:nvPr>
-        </p:nvSpPr>
-        <p:spPr>
-          <a:xfrm>
-            <a:off x="685800" y="1143000"/>
-            <a:ext cx="5486400" cy="3086100"/>
-          </a:xfrm>
-          <a:prstGeom prst="rect">
-            <a:avLst/>
-          </a:prstGeom>
-          <a:noFill/>
-          <a:ln w="12700">
-            <a:solidFill>
-              <a:prstClr val="black"/>
-            </a:solidFill>
-          </a:ln>
-        </p:spPr>
-        <p:txBody>
-          <a:bodyPr vert="horz" lIns="91440" tIns="45720" rIns="91440" bIns="45720" rtlCol="0" anchor="ctr"/>
-          <a:lstStyle/>
-          <a:p>
-            <a:endParaRPr lang="en-US"/>
-          </a:p>
-        </p:txBody>
-      </p:sp>
-      <p:sp>
-        <p:nvSpPr>
-          <p:cNvPr id="5" name="Notes Placeholder 4"/>
-          <p:cNvSpPr>
-            <a:spLocks noGrp="1"/>
-          </p:cNvSpPr>
-          <p:nvPr>
-            <p:ph type="body" sz="quarter" idx="3"/>
-          </p:nvPr>
-        </p:nvSpPr>
-        <p:spPr>
-          <a:xfrm>
-            <a:off x="685800" y="4400550"/>
-            <a:ext cx="5486400" cy="3600450"/>
-          </a:xfrm>
-          <a:prstGeom prst="rect">
-            <a:avLst/>
-          </a:prstGeom>
-        </p:spPr>
-        <p:txBody>
-          <a:bodyPr vert="horz" lIns="91440" tIns="45720" rIns="91440" bIns="45720" rtlCol="0"/>
-          <a:lstStyle/>
-          <a:p>
-            <a:pPr lvl="0"/>
-            <a:r>
-              <a:rPr lang="en-US"/>
-              <a:t>Click to edit Master text styles</a:t>
-            </a:r>
-          </a:p>
-          <a:p>
-            <a:pPr lvl="1"/>
-            <a:r>
-              <a:rPr lang="en-US"/>
-              <a:t>Second level</a:t>
-            </a:r>
-          </a:p>
-          <a:p>
-            <a:pPr lvl="2"/>
-            <a:r>
-              <a:rPr lang="en-US"/>
-              <a:t>Third level</a:t>
-            </a:r>
-          </a:p>
-          <a:p>
-            <a:pPr lvl="3"/>
-            <a:r>
-              <a:rPr lang="en-US"/>
-              <a:t>Fourth level</a:t>
-            </a:r>
-          </a:p>
-          <a:p>
-            <a:pPr lvl="4"/>
-            <a:r>
-              <a:rPr lang="en-US"/>
-              <a:t>Fifth level</a:t>
-            </a:r>
-          </a:p>
-        </p:txBody>
-      </p:sp>
-      <p:sp>
-        <p:nvSpPr>
-          <p:cNvPr id="6" name="Footer Placeholder 5"/>
-          <p:cNvSpPr>
-            <a:spLocks noGrp="1"/>
-          </p:cNvSpPr>
-          <p:nvPr>
-            <p:ph type="ftr" sz="quarter" idx="4"/>
-          </p:nvPr>
-        </p:nvSpPr>
-        <p:spPr>
-          <a:xfrm>
-            <a:off x="0" y="8685213"/>
-            <a:ext cx="2971800" cy="458787"/>
-          </a:xfrm>
-          <a:prstGeom prst="rect">
-            <a:avLst/>
-          </a:prstGeom>
-        </p:spPr>
-        <p:txBody>
-          <a:bodyPr vert="horz" lIns="91440" tIns="45720" rIns="91440" bIns="45720" rtlCol="0" anchor="b"/>
-          <a:lstStyle>
-            <a:lvl1pPr algn="l">
-              <a:defRPr sz="1200"/>
-            </a:lvl1pPr>
-          </a:lstStyle>
-          <a:p>
-            <a:endParaRPr lang="en-US"/>
-          </a:p>
-        </p:txBody>
-      </p:sp>
-      <p:sp>
-        <p:nvSpPr>
-          <p:cNvPr id="7" name="Slide Number Placeholder 6"/>
-          <p:cNvSpPr>
-            <a:spLocks noGrp="1"/>
-          </p:cNvSpPr>
-          <p:nvPr>
-            <p:ph type="sldNum" sz="quarter" idx="5"/>
-          </p:nvPr>
-        </p:nvSpPr>
-        <p:spPr>
-          <a:xfrm>
-            <a:off x="3884613" y="8685213"/>
-            <a:ext cx="2971800" cy="458787"/>
-          </a:xfrm>
-          <a:prstGeom prst="rect">
-            <a:avLst/>
-          </a:prstGeom>
-        </p:spPr>
-        <p:txBody>
-          <a:bodyPr vert="horz" lIns="91440" tIns="45720" rIns="91440" bIns="45720" rtlCol="0" anchor="b"/>
-          <a:lstStyle>
-            <a:lvl1pPr algn="r">
-              <a:defRPr sz="1200"/>
-            </a:lvl1pPr>
-          </a:lstStyle>
-          <a:p>
-            <a:fld id="{CE5E9CC1-C706-0F49-92D6-E571CC5EEA8F}" type="slidenum">
-              <a:rPr lang="en-US"/>
-              <a:t>‹#›</a:t>
-            </a:fld>
-            <a:endParaRPr lang="en-US"/>
-          </a:p>
-        </p:txBody>
-      </p:sp>
     </p:spTree>
     <p:extLst>
       <p:ext uri="{BB962C8B-B14F-4D97-AF65-F5344CB8AC3E}">
-        <p14:creationId xmlns:p14="http://schemas.microsoft.com/office/powerpoint/2010/main" val="1024086991"/>
+        <p14:creationId xmlns:p14="http://schemas.microsoft.com/office/powerpoint/2010/main" val="3485276200"/>
       </p:ext>
     </p:extLst>
   </p:cSld>
@@ -510,10 +291,6 @@
           <a:bodyPr/>
           <a:lstStyle/>
           <a:p>
-            <a:r>
-              <a:rPr lang="en-US" dirty="0"/>
-              <a:t/>
-            </a:r>
             <a:endParaRPr lang="en-US" dirty="0"/>
           </a:p>
         </p:txBody>
@@ -598,10 +375,6 @@
           <a:bodyPr/>
           <a:lstStyle/>
           <a:p>
-            <a:r>
-              <a:rPr lang="en-US" dirty="0"/>
-              <a:t/>
-            </a:r>
             <a:endParaRPr lang="en-US" dirty="0"/>
           </a:p>
         </p:txBody>
@@ -686,10 +459,6 @@
           <a:bodyPr/>
           <a:lstStyle/>
           <a:p>
-            <a:r>
-              <a:rPr lang="en-US" dirty="0"/>
-              <a:t/>
-            </a:r>
             <a:endParaRPr lang="en-US" dirty="0"/>
           </a:p>
         </p:txBody>
@@ -774,10 +543,6 @@
           <a:bodyPr/>
           <a:lstStyle/>
           <a:p>
-            <a:r>
-              <a:rPr lang="en-US" dirty="0"/>
-              <a:t/>
-            </a:r>
             <a:endParaRPr lang="en-US" dirty="0"/>
           </a:p>
         </p:txBody>
@@ -862,10 +627,6 @@
           <a:bodyPr/>
           <a:lstStyle/>
           <a:p>
-            <a:r>
-              <a:rPr lang="en-US" dirty="0"/>
-              <a:t/>
-            </a:r>
             <a:endParaRPr lang="en-US" dirty="0"/>
           </a:p>
         </p:txBody>
@@ -950,10 +711,6 @@
           <a:bodyPr/>
           <a:lstStyle/>
           <a:p>
-            <a:r>
-              <a:rPr lang="en-US" dirty="0"/>
-              <a:t/>
-            </a:r>
             <a:endParaRPr lang="en-US" dirty="0"/>
           </a:p>
         </p:txBody>
@@ -1038,10 +795,6 @@
           <a:bodyPr/>
           <a:lstStyle/>
           <a:p>
-            <a:r>
-              <a:rPr lang="en-US" dirty="0"/>
-              <a:t/>
-            </a:r>
             <a:endParaRPr lang="en-US" dirty="0"/>
           </a:p>
         </p:txBody>
@@ -1126,10 +879,6 @@
           <a:bodyPr/>
           <a:lstStyle/>
           <a:p>
-            <a:r>
-              <a:rPr lang="en-US" dirty="0"/>
-              <a:t/>
-            </a:r>
             <a:endParaRPr lang="en-US" dirty="0"/>
           </a:p>
         </p:txBody>
@@ -1214,10 +963,6 @@
           <a:bodyPr/>
           <a:lstStyle/>
           <a:p>
-            <a:r>
-              <a:rPr lang="en-US" dirty="0"/>
-              <a:t/>
-            </a:r>
             <a:endParaRPr lang="en-US" dirty="0"/>
           </a:p>
         </p:txBody>
@@ -1302,10 +1047,6 @@
           <a:bodyPr/>
           <a:lstStyle/>
           <a:p>
-            <a:r>
-              <a:rPr lang="en-US" dirty="0"/>
-              <a:t/>
-            </a:r>
             <a:endParaRPr lang="en-US" dirty="0"/>
           </a:p>
         </p:txBody>
@@ -1390,10 +1131,6 @@
           <a:bodyPr/>
           <a:lstStyle/>
           <a:p>
-            <a:r>
-              <a:rPr lang="en-US" dirty="0"/>
-              <a:t/>
-            </a:r>
             <a:endParaRPr lang="en-US" dirty="0"/>
           </a:p>
         </p:txBody>
@@ -1467,6 +1204,11 @@
 <file path=ppt/slideMasters/slideMaster1.xml><?xml version="1.0" encoding="utf-8"?>
 <p:sldMaster xmlns:a="http://schemas.openxmlformats.org/drawingml/2006/main" xmlns:r="http://schemas.openxmlformats.org/officeDocument/2006/relationships" xmlns:p="http://schemas.openxmlformats.org/presentationml/2006/main">
   <p:cSld>
+    <p:bg>
+      <p:bgRef idx="1001">
+        <a:schemeClr val="bg1"/>
+      </p:bgRef>
+    </p:bg>
     <p:spTree>
       <p:nvGrpSpPr>
         <p:cNvPr id="1" name=""/>
@@ -1749,6 +1491,7 @@
         <a:solidFill>
           <a:srgbClr val="0D1B2A"/>
         </a:solidFill>
+        <a:effectLst/>
       </p:bgPr>
     </p:bg>
     <p:spTree>
@@ -1789,6 +1532,13 @@
             <a:prstDash val="solid"/>
           </a:ln>
         </p:spPr>
+        <p:txBody>
+          <a:bodyPr/>
+          <a:lstStyle/>
+          <a:p>
+            <a:endParaRPr lang="en-GH"/>
+          </a:p>
+        </p:txBody>
       </p:sp>
       <p:sp>
         <p:nvSpPr>
@@ -1811,11 +1561,11 @@
           <a:bodyPr wrap="square" lIns="0" tIns="0" rIns="0" bIns="0" rtlCol="0" anchor="ctr"/>
           <a:lstStyle/>
           <a:p>
-            <a:pPr indent="0" marL="0">
-              <a:buNone/>
-            </a:pPr>
-            <a:r>
-              <a:rPr lang="en-US" sz="1300" b="1" spc="400" kern="0" dirty="0">
+            <a:pPr marL="0" indent="0">
+              <a:buNone/>
+            </a:pPr>
+            <a:r>
+              <a:rPr lang="en-US" sz="1300" b="1" kern="0" spc="400" dirty="0">
                 <a:solidFill>
                   <a:srgbClr val="A8DADC"/>
                 </a:solidFill>
@@ -1847,7 +1597,7 @@
           <a:bodyPr wrap="square" lIns="0" tIns="0" rIns="0" bIns="0" rtlCol="0" anchor="ctr"/>
           <a:lstStyle/>
           <a:p>
-            <a:pPr indent="0" marL="0">
+            <a:pPr marL="0" indent="0">
               <a:buNone/>
             </a:pPr>
             <a:r>
@@ -1861,7 +1611,7 @@
             <a:endParaRPr lang="en-US" sz="4400" dirty="0"/>
           </a:p>
           <a:p>
-            <a:pPr indent="0" marL="0">
+            <a:pPr marL="0" indent="0">
               <a:buNone/>
             </a:pPr>
             <a:r>
@@ -1900,6 +1650,13 @@
             <a:prstDash val="solid"/>
           </a:ln>
         </p:spPr>
+        <p:txBody>
+          <a:bodyPr/>
+          <a:lstStyle/>
+          <a:p>
+            <a:endParaRPr lang="en-GH"/>
+          </a:p>
+        </p:txBody>
       </p:sp>
       <p:sp>
         <p:nvSpPr>
@@ -1922,7 +1679,7 @@
           <a:bodyPr wrap="square" lIns="0" tIns="0" rIns="0" bIns="0" rtlCol="0" anchor="ctr"/>
           <a:lstStyle/>
           <a:p>
-            <a:pPr indent="0" marL="0">
+            <a:pPr marL="0" indent="0">
               <a:buNone/>
             </a:pPr>
             <a:r>
@@ -1958,7 +1715,7 @@
           <a:bodyPr wrap="square" lIns="0" tIns="0" rIns="0" bIns="0" rtlCol="0" anchor="ctr"/>
           <a:lstStyle/>
           <a:p>
-            <a:pPr indent="0" marL="0">
+            <a:pPr marL="0" indent="0">
               <a:buNone/>
             </a:pPr>
             <a:r>
@@ -1994,7 +1751,7 @@
           <a:bodyPr wrap="square" lIns="0" tIns="0" rIns="0" bIns="0" rtlCol="0" anchor="ctr"/>
           <a:lstStyle/>
           <a:p>
-            <a:pPr indent="0" marL="0">
+            <a:pPr marL="0" indent="0">
               <a:buNone/>
             </a:pPr>
             <a:r>
@@ -2025,6 +1782,7 @@
         <a:solidFill>
           <a:srgbClr val="F0F4F8"/>
         </a:solidFill>
+        <a:effectLst/>
       </p:bgPr>
     </p:bg>
     <p:spTree>
@@ -2062,7 +1820,7 @@
           <a:bodyPr wrap="square" lIns="0" tIns="0" rIns="0" bIns="0" rtlCol="0" anchor="ctr"/>
           <a:lstStyle/>
           <a:p>
-            <a:pPr indent="0" marL="0">
+            <a:pPr marL="0" indent="0">
               <a:buNone/>
             </a:pPr>
             <a:r>
@@ -2101,6 +1859,13 @@
             <a:prstDash val="solid"/>
           </a:ln>
         </p:spPr>
+        <p:txBody>
+          <a:bodyPr/>
+          <a:lstStyle/>
+          <a:p>
+            <a:endParaRPr lang="en-GH"/>
+          </a:p>
+        </p:txBody>
       </p:sp>
       <p:sp>
         <p:nvSpPr>
@@ -2123,7 +1888,7 @@
           <a:bodyPr wrap="square" lIns="0" tIns="0" rIns="0" bIns="0" rtlCol="0" anchor="ctr"/>
           <a:lstStyle/>
           <a:p>
-            <a:pPr algn="ctr" indent="0" marL="0">
+            <a:pPr marL="0" indent="0" algn="ctr">
               <a:buNone/>
             </a:pPr>
             <a:r>
@@ -2162,6 +1927,13 @@
             <a:prstDash val="solid"/>
           </a:ln>
         </p:spPr>
+        <p:txBody>
+          <a:bodyPr/>
+          <a:lstStyle/>
+          <a:p>
+            <a:endParaRPr lang="en-GH"/>
+          </a:p>
+        </p:txBody>
       </p:sp>
       <p:sp>
         <p:nvSpPr>
@@ -2184,7 +1956,7 @@
           <a:bodyPr wrap="square" lIns="0" tIns="0" rIns="0" bIns="0" rtlCol="0" anchor="ctr"/>
           <a:lstStyle/>
           <a:p>
-            <a:pPr indent="0" marL="0">
+            <a:pPr marL="0" indent="0">
               <a:buNone/>
             </a:pPr>
             <a:r>
@@ -2223,6 +1995,13 @@
             <a:prstDash val="solid"/>
           </a:ln>
         </p:spPr>
+        <p:txBody>
+          <a:bodyPr/>
+          <a:lstStyle/>
+          <a:p>
+            <a:endParaRPr lang="en-GH"/>
+          </a:p>
+        </p:txBody>
       </p:sp>
       <p:sp>
         <p:nvSpPr>
@@ -2245,7 +2024,7 @@
           <a:bodyPr wrap="square" lIns="0" tIns="0" rIns="0" bIns="0" rtlCol="0" anchor="ctr"/>
           <a:lstStyle/>
           <a:p>
-            <a:pPr indent="0" marL="0">
+            <a:pPr marL="0" indent="0">
               <a:buNone/>
             </a:pPr>
             <a:r>
@@ -2284,6 +2063,13 @@
             <a:prstDash val="solid"/>
           </a:ln>
         </p:spPr>
+        <p:txBody>
+          <a:bodyPr/>
+          <a:lstStyle/>
+          <a:p>
+            <a:endParaRPr lang="en-GH"/>
+          </a:p>
+        </p:txBody>
       </p:sp>
       <p:sp>
         <p:nvSpPr>
@@ -2306,7 +2092,7 @@
           <a:bodyPr wrap="square" lIns="0" tIns="0" rIns="0" bIns="0" rtlCol="0" anchor="ctr"/>
           <a:lstStyle/>
           <a:p>
-            <a:pPr indent="0" marL="0">
+            <a:pPr marL="0" indent="0">
               <a:buNone/>
             </a:pPr>
             <a:r>
@@ -2345,6 +2131,13 @@
             <a:prstDash val="solid"/>
           </a:ln>
         </p:spPr>
+        <p:txBody>
+          <a:bodyPr/>
+          <a:lstStyle/>
+          <a:p>
+            <a:endParaRPr lang="en-GH"/>
+          </a:p>
+        </p:txBody>
       </p:sp>
       <p:sp>
         <p:nvSpPr>
@@ -2367,7 +2160,7 @@
           <a:bodyPr wrap="square" lIns="0" tIns="0" rIns="0" bIns="0" rtlCol="0" anchor="ctr"/>
           <a:lstStyle/>
           <a:p>
-            <a:pPr indent="0" marL="0">
+            <a:pPr marL="0" indent="0">
               <a:buNone/>
             </a:pPr>
             <a:r>
@@ -2406,6 +2199,13 @@
             <a:prstDash val="solid"/>
           </a:ln>
         </p:spPr>
+        <p:txBody>
+          <a:bodyPr/>
+          <a:lstStyle/>
+          <a:p>
+            <a:endParaRPr lang="en-GH"/>
+          </a:p>
+        </p:txBody>
       </p:sp>
       <p:sp>
         <p:nvSpPr>
@@ -2428,7 +2228,7 @@
           <a:bodyPr wrap="square" lIns="0" tIns="0" rIns="0" bIns="0" rtlCol="0" anchor="ctr"/>
           <a:lstStyle/>
           <a:p>
-            <a:pPr algn="ctr" indent="0" marL="0">
+            <a:pPr marL="0" indent="0" algn="ctr">
               <a:buNone/>
             </a:pPr>
             <a:r>
@@ -2467,6 +2267,13 @@
             <a:prstDash val="solid"/>
           </a:ln>
         </p:spPr>
+        <p:txBody>
+          <a:bodyPr/>
+          <a:lstStyle/>
+          <a:p>
+            <a:endParaRPr lang="en-GH"/>
+          </a:p>
+        </p:txBody>
       </p:sp>
       <p:sp>
         <p:nvSpPr>
@@ -2489,7 +2296,7 @@
           <a:bodyPr wrap="square" lIns="0" tIns="0" rIns="0" bIns="0" rtlCol="0" anchor="ctr"/>
           <a:lstStyle/>
           <a:p>
-            <a:pPr indent="0" marL="0">
+            <a:pPr marL="0" indent="0">
               <a:buNone/>
             </a:pPr>
             <a:r>
@@ -2528,6 +2335,13 @@
             <a:prstDash val="solid"/>
           </a:ln>
         </p:spPr>
+        <p:txBody>
+          <a:bodyPr/>
+          <a:lstStyle/>
+          <a:p>
+            <a:endParaRPr lang="en-GH"/>
+          </a:p>
+        </p:txBody>
       </p:sp>
       <p:sp>
         <p:nvSpPr>
@@ -2550,7 +2364,7 @@
           <a:bodyPr wrap="square" lIns="0" tIns="0" rIns="0" bIns="0" rtlCol="0" anchor="ctr"/>
           <a:lstStyle/>
           <a:p>
-            <a:pPr indent="0" marL="0">
+            <a:pPr marL="0" indent="0">
               <a:buNone/>
             </a:pPr>
             <a:r>
@@ -2589,6 +2403,13 @@
             <a:prstDash val="solid"/>
           </a:ln>
         </p:spPr>
+        <p:txBody>
+          <a:bodyPr/>
+          <a:lstStyle/>
+          <a:p>
+            <a:endParaRPr lang="en-GH"/>
+          </a:p>
+        </p:txBody>
       </p:sp>
       <p:sp>
         <p:nvSpPr>
@@ -2611,7 +2432,7 @@
           <a:bodyPr wrap="square" lIns="0" tIns="0" rIns="0" bIns="0" rtlCol="0" anchor="ctr"/>
           <a:lstStyle/>
           <a:p>
-            <a:pPr indent="0" marL="0">
+            <a:pPr marL="0" indent="0">
               <a:buNone/>
             </a:pPr>
             <a:r>
@@ -2650,6 +2471,13 @@
             <a:prstDash val="solid"/>
           </a:ln>
         </p:spPr>
+        <p:txBody>
+          <a:bodyPr/>
+          <a:lstStyle/>
+          <a:p>
+            <a:endParaRPr lang="en-GH"/>
+          </a:p>
+        </p:txBody>
       </p:sp>
       <p:sp>
         <p:nvSpPr>
@@ -2672,7 +2500,7 @@
           <a:bodyPr wrap="square" lIns="0" tIns="0" rIns="0" bIns="0" rtlCol="0" anchor="ctr"/>
           <a:lstStyle/>
           <a:p>
-            <a:pPr indent="0" marL="0">
+            <a:pPr marL="0" indent="0">
               <a:buNone/>
             </a:pPr>
             <a:r>
@@ -2703,6 +2531,7 @@
         <a:solidFill>
           <a:srgbClr val="0D1B2A"/>
         </a:solidFill>
+        <a:effectLst/>
       </p:bgPr>
     </p:bg>
     <p:spTree>
@@ -2743,6 +2572,13 @@
             <a:prstDash val="solid"/>
           </a:ln>
         </p:spPr>
+        <p:txBody>
+          <a:bodyPr/>
+          <a:lstStyle/>
+          <a:p>
+            <a:endParaRPr lang="en-GH"/>
+          </a:p>
+        </p:txBody>
       </p:sp>
       <p:sp>
         <p:nvSpPr>
@@ -2765,7 +2601,7 @@
           <a:bodyPr wrap="square" lIns="0" tIns="0" rIns="0" bIns="0" rtlCol="0" anchor="ctr"/>
           <a:lstStyle/>
           <a:p>
-            <a:pPr indent="0" marL="0">
+            <a:pPr marL="0" indent="0">
               <a:buNone/>
             </a:pPr>
             <a:r>
@@ -2804,6 +2640,13 @@
             <a:prstDash val="solid"/>
           </a:ln>
         </p:spPr>
+        <p:txBody>
+          <a:bodyPr/>
+          <a:lstStyle/>
+          <a:p>
+            <a:endParaRPr lang="en-GH"/>
+          </a:p>
+        </p:txBody>
       </p:sp>
       <p:sp>
         <p:nvSpPr>
@@ -2826,7 +2669,7 @@
           <a:bodyPr wrap="square" lIns="0" tIns="0" rIns="0" bIns="0" rtlCol="0" anchor="ctr"/>
           <a:lstStyle/>
           <a:p>
-            <a:pPr indent="0" marL="0">
+            <a:pPr marL="0" indent="0">
               <a:buNone/>
             </a:pPr>
             <a:r>
@@ -2862,7 +2705,7 @@
           <a:bodyPr wrap="square" lIns="0" tIns="0" rIns="0" bIns="0" rtlCol="0" anchor="ctr"/>
           <a:lstStyle/>
           <a:p>
-            <a:pPr indent="0" marL="0">
+            <a:pPr marL="0" indent="0">
               <a:buNone/>
             </a:pPr>
             <a:r>
@@ -2898,7 +2741,7 @@
           <a:bodyPr wrap="square" lIns="0" tIns="0" rIns="0" bIns="0" rtlCol="0" anchor="ctr"/>
           <a:lstStyle/>
           <a:p>
-            <a:pPr indent="0" marL="0">
+            <a:pPr marL="0" indent="0">
               <a:buNone/>
             </a:pPr>
             <a:r>
@@ -2934,7 +2777,7 @@
           <a:bodyPr wrap="square" lIns="0" tIns="0" rIns="0" bIns="0" rtlCol="0" anchor="ctr"/>
           <a:lstStyle/>
           <a:p>
-            <a:pPr indent="0" marL="0">
+            <a:pPr marL="0" indent="0">
               <a:buNone/>
             </a:pPr>
             <a:r>
@@ -2970,7 +2813,7 @@
           <a:bodyPr wrap="square" lIns="0" tIns="0" rIns="0" bIns="0" rtlCol="0" anchor="ctr"/>
           <a:lstStyle/>
           <a:p>
-            <a:pPr indent="0" marL="0">
+            <a:pPr marL="0" indent="0">
               <a:buNone/>
             </a:pPr>
             <a:r>
@@ -3001,6 +2844,7 @@
         <a:solidFill>
           <a:srgbClr val="F0F4F8"/>
         </a:solidFill>
+        <a:effectLst/>
       </p:bgPr>
     </p:bg>
     <p:spTree>
@@ -3038,7 +2882,7 @@
           <a:bodyPr wrap="square" lIns="0" tIns="0" rIns="0" bIns="0" rtlCol="0" anchor="ctr"/>
           <a:lstStyle/>
           <a:p>
-            <a:pPr indent="0" marL="0">
+            <a:pPr marL="0" indent="0">
               <a:buNone/>
             </a:pPr>
             <a:r>
@@ -3077,6 +2921,13 @@
             <a:prstDash val="solid"/>
           </a:ln>
         </p:spPr>
+        <p:txBody>
+          <a:bodyPr/>
+          <a:lstStyle/>
+          <a:p>
+            <a:endParaRPr lang="en-GH"/>
+          </a:p>
+        </p:txBody>
       </p:sp>
       <p:sp>
         <p:nvSpPr>
@@ -3099,7 +2950,7 @@
           <a:bodyPr wrap="square" lIns="0" tIns="0" rIns="0" bIns="0" rtlCol="0" anchor="ctr"/>
           <a:lstStyle/>
           <a:p>
-            <a:pPr algn="ctr" indent="0" marL="0">
+            <a:pPr marL="0" indent="0" algn="ctr">
               <a:buNone/>
             </a:pPr>
             <a:r>
@@ -3135,7 +2986,7 @@
           <a:bodyPr wrap="square" lIns="0" tIns="0" rIns="0" bIns="0" rtlCol="0" anchor="ctr"/>
           <a:lstStyle/>
           <a:p>
-            <a:pPr algn="ctr" indent="0" marL="0">
+            <a:pPr marL="0" indent="0" algn="ctr">
               <a:buNone/>
             </a:pPr>
             <a:r>
@@ -3149,7 +3000,7 @@
             <a:endParaRPr lang="en-US" sz="1100" dirty="0"/>
           </a:p>
           <a:p>
-            <a:pPr algn="ctr" indent="0" marL="0">
+            <a:pPr marL="0" indent="0" algn="ctr">
               <a:buNone/>
             </a:pPr>
             <a:r>
@@ -3188,6 +3039,13 @@
             <a:prstDash val="solid"/>
           </a:ln>
         </p:spPr>
+        <p:txBody>
+          <a:bodyPr/>
+          <a:lstStyle/>
+          <a:p>
+            <a:endParaRPr lang="en-GH"/>
+          </a:p>
+        </p:txBody>
       </p:sp>
       <p:sp>
         <p:nvSpPr>
@@ -3210,7 +3068,7 @@
           <a:bodyPr wrap="square" lIns="0" tIns="0" rIns="0" bIns="0" rtlCol="0" anchor="ctr"/>
           <a:lstStyle/>
           <a:p>
-            <a:pPr algn="ctr" indent="0" marL="0">
+            <a:pPr marL="0" indent="0" algn="ctr">
               <a:buNone/>
             </a:pPr>
             <a:r>
@@ -3246,7 +3104,7 @@
           <a:bodyPr wrap="square" lIns="0" tIns="0" rIns="0" bIns="0" rtlCol="0" anchor="ctr"/>
           <a:lstStyle/>
           <a:p>
-            <a:pPr algn="ctr" indent="0" marL="0">
+            <a:pPr marL="0" indent="0" algn="ctr">
               <a:buNone/>
             </a:pPr>
             <a:r>
@@ -3260,7 +3118,7 @@
             <a:endParaRPr lang="en-US" sz="1100" dirty="0"/>
           </a:p>
           <a:p>
-            <a:pPr algn="ctr" indent="0" marL="0">
+            <a:pPr marL="0" indent="0" algn="ctr">
               <a:buNone/>
             </a:pPr>
             <a:r>
@@ -3299,6 +3157,13 @@
             <a:prstDash val="solid"/>
           </a:ln>
         </p:spPr>
+        <p:txBody>
+          <a:bodyPr/>
+          <a:lstStyle/>
+          <a:p>
+            <a:endParaRPr lang="en-GH"/>
+          </a:p>
+        </p:txBody>
       </p:sp>
       <p:sp>
         <p:nvSpPr>
@@ -3321,7 +3186,7 @@
           <a:bodyPr wrap="square" lIns="0" tIns="0" rIns="0" bIns="0" rtlCol="0" anchor="ctr"/>
           <a:lstStyle/>
           <a:p>
-            <a:pPr algn="ctr" indent="0" marL="0">
+            <a:pPr marL="0" indent="0" algn="ctr">
               <a:buNone/>
             </a:pPr>
             <a:r>
@@ -3357,7 +3222,7 @@
           <a:bodyPr wrap="square" lIns="0" tIns="0" rIns="0" bIns="0" rtlCol="0" anchor="ctr"/>
           <a:lstStyle/>
           <a:p>
-            <a:pPr algn="ctr" indent="0" marL="0">
+            <a:pPr marL="0" indent="0" algn="ctr">
               <a:buNone/>
             </a:pPr>
             <a:r>
@@ -3371,7 +3236,7 @@
             <a:endParaRPr lang="en-US" sz="1100" dirty="0"/>
           </a:p>
           <a:p>
-            <a:pPr algn="ctr" indent="0" marL="0">
+            <a:pPr marL="0" indent="0" algn="ctr">
               <a:buNone/>
             </a:pPr>
             <a:r>
@@ -3407,7 +3272,7 @@
           <a:bodyPr wrap="square" lIns="0" tIns="0" rIns="0" bIns="0" rtlCol="0" anchor="ctr"/>
           <a:lstStyle/>
           <a:p>
-            <a:pPr indent="0" marL="0">
+            <a:pPr marL="0" indent="0">
               <a:buNone/>
             </a:pPr>
             <a:r>
@@ -3443,7 +3308,7 @@
           <a:bodyPr wrap="square" lIns="0" tIns="0" rIns="0" bIns="0" rtlCol="0" anchor="ctr"/>
           <a:lstStyle/>
           <a:p>
-            <a:pPr indent="0" marL="0">
+            <a:pPr marL="0" indent="0">
               <a:buNone/>
             </a:pPr>
             <a:r>
@@ -3457,7 +3322,7 @@
             <a:endParaRPr lang="en-US" sz="1300" dirty="0"/>
           </a:p>
           <a:p>
-            <a:pPr indent="0" marL="0">
+            <a:pPr marL="0" indent="0">
               <a:buNone/>
             </a:pPr>
             <a:r>
@@ -3471,7 +3336,7 @@
             <a:endParaRPr lang="en-US" sz="1300" dirty="0"/>
           </a:p>
           <a:p>
-            <a:pPr indent="0" marL="0">
+            <a:pPr marL="0" indent="0">
               <a:buNone/>
             </a:pPr>
             <a:r>
@@ -3502,6 +3367,7 @@
         <a:solidFill>
           <a:srgbClr val="F0F4F8"/>
         </a:solidFill>
+        <a:effectLst/>
       </p:bgPr>
     </p:bg>
     <p:spTree>
@@ -3539,7 +3405,7 @@
           <a:bodyPr wrap="square" lIns="0" tIns="0" rIns="0" bIns="0" rtlCol="0" anchor="ctr"/>
           <a:lstStyle/>
           <a:p>
-            <a:pPr indent="0" marL="0">
+            <a:pPr marL="0" indent="0">
               <a:buNone/>
             </a:pPr>
             <a:r>
@@ -3578,6 +3444,13 @@
             <a:prstDash val="solid"/>
           </a:ln>
         </p:spPr>
+        <p:txBody>
+          <a:bodyPr/>
+          <a:lstStyle/>
+          <a:p>
+            <a:endParaRPr lang="en-GH"/>
+          </a:p>
+        </p:txBody>
       </p:sp>
       <p:sp>
         <p:nvSpPr>
@@ -3603,6 +3476,13 @@
             <a:prstDash val="solid"/>
           </a:ln>
         </p:spPr>
+        <p:txBody>
+          <a:bodyPr/>
+          <a:lstStyle/>
+          <a:p>
+            <a:endParaRPr lang="en-GH"/>
+          </a:p>
+        </p:txBody>
       </p:sp>
       <p:sp>
         <p:nvSpPr>
@@ -3625,7 +3505,7 @@
           <a:bodyPr wrap="square" lIns="0" tIns="0" rIns="0" bIns="0" rtlCol="0" anchor="ctr"/>
           <a:lstStyle/>
           <a:p>
-            <a:pPr algn="ctr" indent="0" marL="0">
+            <a:pPr marL="0" indent="0" algn="ctr">
               <a:buNone/>
             </a:pPr>
             <a:r>
@@ -3661,7 +3541,7 @@
           <a:bodyPr wrap="square" lIns="0" tIns="0" rIns="0" bIns="0" rtlCol="0" anchor="ctr"/>
           <a:lstStyle/>
           <a:p>
-            <a:pPr indent="0" marL="0">
+            <a:pPr marL="0" indent="0">
               <a:buNone/>
             </a:pPr>
             <a:r>
@@ -3697,7 +3577,7 @@
           <a:bodyPr wrap="square" lIns="0" tIns="0" rIns="0" bIns="0" rtlCol="0" anchor="ctr"/>
           <a:lstStyle/>
           <a:p>
-            <a:pPr indent="0" marL="0">
+            <a:pPr marL="0" indent="0">
               <a:buNone/>
             </a:pPr>
             <a:r>
@@ -3736,6 +3616,13 @@
             <a:prstDash val="solid"/>
           </a:ln>
         </p:spPr>
+        <p:txBody>
+          <a:bodyPr/>
+          <a:lstStyle/>
+          <a:p>
+            <a:endParaRPr lang="en-GH"/>
+          </a:p>
+        </p:txBody>
       </p:sp>
       <p:sp>
         <p:nvSpPr>
@@ -3761,6 +3648,13 @@
             <a:prstDash val="solid"/>
           </a:ln>
         </p:spPr>
+        <p:txBody>
+          <a:bodyPr/>
+          <a:lstStyle/>
+          <a:p>
+            <a:endParaRPr lang="en-GH"/>
+          </a:p>
+        </p:txBody>
       </p:sp>
       <p:sp>
         <p:nvSpPr>
@@ -3783,7 +3677,7 @@
           <a:bodyPr wrap="square" lIns="0" tIns="0" rIns="0" bIns="0" rtlCol="0" anchor="ctr"/>
           <a:lstStyle/>
           <a:p>
-            <a:pPr algn="ctr" indent="0" marL="0">
+            <a:pPr marL="0" indent="0" algn="ctr">
               <a:buNone/>
             </a:pPr>
             <a:r>
@@ -3819,7 +3713,7 @@
           <a:bodyPr wrap="square" lIns="0" tIns="0" rIns="0" bIns="0" rtlCol="0" anchor="ctr"/>
           <a:lstStyle/>
           <a:p>
-            <a:pPr indent="0" marL="0">
+            <a:pPr marL="0" indent="0">
               <a:buNone/>
             </a:pPr>
             <a:r>
@@ -3855,7 +3749,7 @@
           <a:bodyPr wrap="square" lIns="0" tIns="0" rIns="0" bIns="0" rtlCol="0" anchor="ctr"/>
           <a:lstStyle/>
           <a:p>
-            <a:pPr indent="0" marL="0">
+            <a:pPr marL="0" indent="0">
               <a:buNone/>
             </a:pPr>
             <a:r>
@@ -3894,6 +3788,13 @@
             <a:prstDash val="solid"/>
           </a:ln>
         </p:spPr>
+        <p:txBody>
+          <a:bodyPr/>
+          <a:lstStyle/>
+          <a:p>
+            <a:endParaRPr lang="en-GH"/>
+          </a:p>
+        </p:txBody>
       </p:sp>
       <p:sp>
         <p:nvSpPr>
@@ -3919,6 +3820,13 @@
             <a:prstDash val="solid"/>
           </a:ln>
         </p:spPr>
+        <p:txBody>
+          <a:bodyPr/>
+          <a:lstStyle/>
+          <a:p>
+            <a:endParaRPr lang="en-GH"/>
+          </a:p>
+        </p:txBody>
       </p:sp>
       <p:sp>
         <p:nvSpPr>
@@ -3941,7 +3849,7 @@
           <a:bodyPr wrap="square" lIns="0" tIns="0" rIns="0" bIns="0" rtlCol="0" anchor="ctr"/>
           <a:lstStyle/>
           <a:p>
-            <a:pPr algn="ctr" indent="0" marL="0">
+            <a:pPr marL="0" indent="0" algn="ctr">
               <a:buNone/>
             </a:pPr>
             <a:r>
@@ -3977,7 +3885,7 @@
           <a:bodyPr wrap="square" lIns="0" tIns="0" rIns="0" bIns="0" rtlCol="0" anchor="ctr"/>
           <a:lstStyle/>
           <a:p>
-            <a:pPr indent="0" marL="0">
+            <a:pPr marL="0" indent="0">
               <a:buNone/>
             </a:pPr>
             <a:r>
@@ -4013,7 +3921,7 @@
           <a:bodyPr wrap="square" lIns="0" tIns="0" rIns="0" bIns="0" rtlCol="0" anchor="ctr"/>
           <a:lstStyle/>
           <a:p>
-            <a:pPr indent="0" marL="0">
+            <a:pPr marL="0" indent="0">
               <a:buNone/>
             </a:pPr>
             <a:r>
@@ -4052,6 +3960,13 @@
             <a:prstDash val="solid"/>
           </a:ln>
         </p:spPr>
+        <p:txBody>
+          <a:bodyPr/>
+          <a:lstStyle/>
+          <a:p>
+            <a:endParaRPr lang="en-GH"/>
+          </a:p>
+        </p:txBody>
       </p:sp>
       <p:sp>
         <p:nvSpPr>
@@ -4077,6 +3992,13 @@
             <a:prstDash val="solid"/>
           </a:ln>
         </p:spPr>
+        <p:txBody>
+          <a:bodyPr/>
+          <a:lstStyle/>
+          <a:p>
+            <a:endParaRPr lang="en-GH"/>
+          </a:p>
+        </p:txBody>
       </p:sp>
       <p:sp>
         <p:nvSpPr>
@@ -4099,7 +4021,7 @@
           <a:bodyPr wrap="square" lIns="0" tIns="0" rIns="0" bIns="0" rtlCol="0" anchor="ctr"/>
           <a:lstStyle/>
           <a:p>
-            <a:pPr algn="ctr" indent="0" marL="0">
+            <a:pPr marL="0" indent="0" algn="ctr">
               <a:buNone/>
             </a:pPr>
             <a:r>
@@ -4135,7 +4057,7 @@
           <a:bodyPr wrap="square" lIns="0" tIns="0" rIns="0" bIns="0" rtlCol="0" anchor="ctr"/>
           <a:lstStyle/>
           <a:p>
-            <a:pPr indent="0" marL="0">
+            <a:pPr marL="0" indent="0">
               <a:buNone/>
             </a:pPr>
             <a:r>
@@ -4171,7 +4093,7 @@
           <a:bodyPr wrap="square" lIns="0" tIns="0" rIns="0" bIns="0" rtlCol="0" anchor="ctr"/>
           <a:lstStyle/>
           <a:p>
-            <a:pPr indent="0" marL="0">
+            <a:pPr marL="0" indent="0">
               <a:buNone/>
             </a:pPr>
             <a:r>
@@ -4202,6 +4124,7 @@
         <a:solidFill>
           <a:srgbClr val="F0F4F8"/>
         </a:solidFill>
+        <a:effectLst/>
       </p:bgPr>
     </p:bg>
     <p:spTree>
@@ -4239,7 +4162,7 @@
           <a:bodyPr wrap="square" lIns="0" tIns="0" rIns="0" bIns="0" rtlCol="0" anchor="ctr"/>
           <a:lstStyle/>
           <a:p>
-            <a:pPr indent="0" marL="0">
+            <a:pPr marL="0" indent="0">
               <a:buNone/>
             </a:pPr>
             <a:r>
@@ -4278,6 +4201,13 @@
             <a:prstDash val="solid"/>
           </a:ln>
         </p:spPr>
+        <p:txBody>
+          <a:bodyPr/>
+          <a:lstStyle/>
+          <a:p>
+            <a:endParaRPr lang="en-GH"/>
+          </a:p>
+        </p:txBody>
       </p:sp>
       <p:sp>
         <p:nvSpPr>
@@ -4303,6 +4233,13 @@
             <a:prstDash val="solid"/>
           </a:ln>
         </p:spPr>
+        <p:txBody>
+          <a:bodyPr/>
+          <a:lstStyle/>
+          <a:p>
+            <a:endParaRPr lang="en-GH"/>
+          </a:p>
+        </p:txBody>
       </p:sp>
       <p:sp>
         <p:nvSpPr>
@@ -4325,7 +4262,7 @@
           <a:bodyPr wrap="square" lIns="0" tIns="0" rIns="0" bIns="0" rtlCol="0" anchor="ctr"/>
           <a:lstStyle/>
           <a:p>
-            <a:pPr algn="ctr" indent="0" marL="0">
+            <a:pPr marL="0" indent="0" algn="ctr">
               <a:buNone/>
             </a:pPr>
             <a:r>
@@ -4361,7 +4298,7 @@
           <a:bodyPr wrap="square" lIns="0" tIns="0" rIns="0" bIns="0" rtlCol="0" anchor="ctr"/>
           <a:lstStyle/>
           <a:p>
-            <a:pPr indent="0" marL="0">
+            <a:pPr marL="0" indent="0">
               <a:buNone/>
             </a:pPr>
             <a:r>
@@ -4397,7 +4334,7 @@
           <a:bodyPr wrap="square" lIns="0" tIns="0" rIns="0" bIns="0" rtlCol="0" anchor="ctr"/>
           <a:lstStyle/>
           <a:p>
-            <a:pPr indent="0" marL="0">
+            <a:pPr marL="0" indent="0">
               <a:buNone/>
             </a:pPr>
             <a:r>
@@ -4436,6 +4373,13 @@
             <a:prstDash val="solid"/>
           </a:ln>
         </p:spPr>
+        <p:txBody>
+          <a:bodyPr/>
+          <a:lstStyle/>
+          <a:p>
+            <a:endParaRPr lang="en-GH"/>
+          </a:p>
+        </p:txBody>
       </p:sp>
       <p:sp>
         <p:nvSpPr>
@@ -4461,6 +4405,13 @@
             <a:prstDash val="solid"/>
           </a:ln>
         </p:spPr>
+        <p:txBody>
+          <a:bodyPr/>
+          <a:lstStyle/>
+          <a:p>
+            <a:endParaRPr lang="en-GH"/>
+          </a:p>
+        </p:txBody>
       </p:sp>
       <p:sp>
         <p:nvSpPr>
@@ -4483,7 +4434,7 @@
           <a:bodyPr wrap="square" lIns="0" tIns="0" rIns="0" bIns="0" rtlCol="0" anchor="ctr"/>
           <a:lstStyle/>
           <a:p>
-            <a:pPr algn="ctr" indent="0" marL="0">
+            <a:pPr marL="0" indent="0" algn="ctr">
               <a:buNone/>
             </a:pPr>
             <a:r>
@@ -4519,7 +4470,7 @@
           <a:bodyPr wrap="square" lIns="0" tIns="0" rIns="0" bIns="0" rtlCol="0" anchor="ctr"/>
           <a:lstStyle/>
           <a:p>
-            <a:pPr indent="0" marL="0">
+            <a:pPr marL="0" indent="0">
               <a:buNone/>
             </a:pPr>
             <a:r>
@@ -4555,7 +4506,7 @@
           <a:bodyPr wrap="square" lIns="0" tIns="0" rIns="0" bIns="0" rtlCol="0" anchor="ctr"/>
           <a:lstStyle/>
           <a:p>
-            <a:pPr indent="0" marL="0">
+            <a:pPr marL="0" indent="0">
               <a:buNone/>
             </a:pPr>
             <a:r>
@@ -4594,6 +4545,13 @@
             <a:prstDash val="solid"/>
           </a:ln>
         </p:spPr>
+        <p:txBody>
+          <a:bodyPr/>
+          <a:lstStyle/>
+          <a:p>
+            <a:endParaRPr lang="en-GH"/>
+          </a:p>
+        </p:txBody>
       </p:sp>
       <p:sp>
         <p:nvSpPr>
@@ -4619,6 +4577,13 @@
             <a:prstDash val="solid"/>
           </a:ln>
         </p:spPr>
+        <p:txBody>
+          <a:bodyPr/>
+          <a:lstStyle/>
+          <a:p>
+            <a:endParaRPr lang="en-GH"/>
+          </a:p>
+        </p:txBody>
       </p:sp>
       <p:sp>
         <p:nvSpPr>
@@ -4641,7 +4606,7 @@
           <a:bodyPr wrap="square" lIns="0" tIns="0" rIns="0" bIns="0" rtlCol="0" anchor="ctr"/>
           <a:lstStyle/>
           <a:p>
-            <a:pPr algn="ctr" indent="0" marL="0">
+            <a:pPr marL="0" indent="0" algn="ctr">
               <a:buNone/>
             </a:pPr>
             <a:r>
@@ -4677,7 +4642,7 @@
           <a:bodyPr wrap="square" lIns="0" tIns="0" rIns="0" bIns="0" rtlCol="0" anchor="ctr"/>
           <a:lstStyle/>
           <a:p>
-            <a:pPr indent="0" marL="0">
+            <a:pPr marL="0" indent="0">
               <a:buNone/>
             </a:pPr>
             <a:r>
@@ -4713,7 +4678,7 @@
           <a:bodyPr wrap="square" lIns="0" tIns="0" rIns="0" bIns="0" rtlCol="0" anchor="ctr"/>
           <a:lstStyle/>
           <a:p>
-            <a:pPr indent="0" marL="0">
+            <a:pPr marL="0" indent="0">
               <a:buNone/>
             </a:pPr>
             <a:r>
@@ -4752,6 +4717,13 @@
             <a:prstDash val="solid"/>
           </a:ln>
         </p:spPr>
+        <p:txBody>
+          <a:bodyPr/>
+          <a:lstStyle/>
+          <a:p>
+            <a:endParaRPr lang="en-GH"/>
+          </a:p>
+        </p:txBody>
       </p:sp>
       <p:sp>
         <p:nvSpPr>
@@ -4777,6 +4749,13 @@
             <a:prstDash val="solid"/>
           </a:ln>
         </p:spPr>
+        <p:txBody>
+          <a:bodyPr/>
+          <a:lstStyle/>
+          <a:p>
+            <a:endParaRPr lang="en-GH"/>
+          </a:p>
+        </p:txBody>
       </p:sp>
       <p:sp>
         <p:nvSpPr>
@@ -4799,7 +4778,7 @@
           <a:bodyPr wrap="square" lIns="0" tIns="0" rIns="0" bIns="0" rtlCol="0" anchor="ctr"/>
           <a:lstStyle/>
           <a:p>
-            <a:pPr algn="ctr" indent="0" marL="0">
+            <a:pPr marL="0" indent="0" algn="ctr">
               <a:buNone/>
             </a:pPr>
             <a:r>
@@ -4835,7 +4814,7 @@
           <a:bodyPr wrap="square" lIns="0" tIns="0" rIns="0" bIns="0" rtlCol="0" anchor="ctr"/>
           <a:lstStyle/>
           <a:p>
-            <a:pPr indent="0" marL="0">
+            <a:pPr marL="0" indent="0">
               <a:buNone/>
             </a:pPr>
             <a:r>
@@ -4871,7 +4850,7 @@
           <a:bodyPr wrap="square" lIns="0" tIns="0" rIns="0" bIns="0" rtlCol="0" anchor="ctr"/>
           <a:lstStyle/>
           <a:p>
-            <a:pPr indent="0" marL="0">
+            <a:pPr marL="0" indent="0">
               <a:buNone/>
             </a:pPr>
             <a:r>
@@ -4910,6 +4889,13 @@
             <a:prstDash val="solid"/>
           </a:ln>
         </p:spPr>
+        <p:txBody>
+          <a:bodyPr/>
+          <a:lstStyle/>
+          <a:p>
+            <a:endParaRPr lang="en-GH"/>
+          </a:p>
+        </p:txBody>
       </p:sp>
       <p:sp>
         <p:nvSpPr>
@@ -4935,6 +4921,13 @@
             <a:prstDash val="solid"/>
           </a:ln>
         </p:spPr>
+        <p:txBody>
+          <a:bodyPr/>
+          <a:lstStyle/>
+          <a:p>
+            <a:endParaRPr lang="en-GH"/>
+          </a:p>
+        </p:txBody>
       </p:sp>
       <p:sp>
         <p:nvSpPr>
@@ -4957,7 +4950,7 @@
           <a:bodyPr wrap="square" lIns="0" tIns="0" rIns="0" bIns="0" rtlCol="0" anchor="ctr"/>
           <a:lstStyle/>
           <a:p>
-            <a:pPr algn="ctr" indent="0" marL="0">
+            <a:pPr marL="0" indent="0" algn="ctr">
               <a:buNone/>
             </a:pPr>
             <a:r>
@@ -4993,7 +4986,7 @@
           <a:bodyPr wrap="square" lIns="0" tIns="0" rIns="0" bIns="0" rtlCol="0" anchor="ctr"/>
           <a:lstStyle/>
           <a:p>
-            <a:pPr indent="0" marL="0">
+            <a:pPr marL="0" indent="0">
               <a:buNone/>
             </a:pPr>
             <a:r>
@@ -5029,7 +5022,7 @@
           <a:bodyPr wrap="square" lIns="0" tIns="0" rIns="0" bIns="0" rtlCol="0" anchor="ctr"/>
           <a:lstStyle/>
           <a:p>
-            <a:pPr indent="0" marL="0">
+            <a:pPr marL="0" indent="0">
               <a:buNone/>
             </a:pPr>
             <a:r>
@@ -5068,6 +5061,13 @@
             <a:prstDash val="solid"/>
           </a:ln>
         </p:spPr>
+        <p:txBody>
+          <a:bodyPr/>
+          <a:lstStyle/>
+          <a:p>
+            <a:endParaRPr lang="en-GH"/>
+          </a:p>
+        </p:txBody>
       </p:sp>
       <p:sp>
         <p:nvSpPr>
@@ -5093,6 +5093,13 @@
             <a:prstDash val="solid"/>
           </a:ln>
         </p:spPr>
+        <p:txBody>
+          <a:bodyPr/>
+          <a:lstStyle/>
+          <a:p>
+            <a:endParaRPr lang="en-GH"/>
+          </a:p>
+        </p:txBody>
       </p:sp>
       <p:sp>
         <p:nvSpPr>
@@ -5115,7 +5122,7 @@
           <a:bodyPr wrap="square" lIns="0" tIns="0" rIns="0" bIns="0" rtlCol="0" anchor="ctr"/>
           <a:lstStyle/>
           <a:p>
-            <a:pPr algn="ctr" indent="0" marL="0">
+            <a:pPr marL="0" indent="0" algn="ctr">
               <a:buNone/>
             </a:pPr>
             <a:r>
@@ -5151,7 +5158,7 @@
           <a:bodyPr wrap="square" lIns="0" tIns="0" rIns="0" bIns="0" rtlCol="0" anchor="ctr"/>
           <a:lstStyle/>
           <a:p>
-            <a:pPr indent="0" marL="0">
+            <a:pPr marL="0" indent="0">
               <a:buNone/>
             </a:pPr>
             <a:r>
@@ -5187,7 +5194,7 @@
           <a:bodyPr wrap="square" lIns="0" tIns="0" rIns="0" bIns="0" rtlCol="0" anchor="ctr"/>
           <a:lstStyle/>
           <a:p>
-            <a:pPr indent="0" marL="0">
+            <a:pPr marL="0" indent="0">
               <a:buNone/>
             </a:pPr>
             <a:r>
@@ -5218,6 +5225,7 @@
         <a:solidFill>
           <a:srgbClr val="F0F4F8"/>
         </a:solidFill>
+        <a:effectLst/>
       </p:bgPr>
     </p:bg>
     <p:spTree>
@@ -5255,7 +5263,7 @@
           <a:bodyPr wrap="square" lIns="0" tIns="0" rIns="0" bIns="0" rtlCol="0" anchor="ctr"/>
           <a:lstStyle/>
           <a:p>
-            <a:pPr indent="0" marL="0">
+            <a:pPr marL="0" indent="0">
               <a:buNone/>
             </a:pPr>
             <a:r>
@@ -5294,6 +5302,13 @@
             <a:prstDash val="solid"/>
           </a:ln>
         </p:spPr>
+        <p:txBody>
+          <a:bodyPr/>
+          <a:lstStyle/>
+          <a:p>
+            <a:endParaRPr lang="en-GH"/>
+          </a:p>
+        </p:txBody>
       </p:sp>
       <p:sp>
         <p:nvSpPr>
@@ -5319,6 +5334,13 @@
             <a:prstDash val="solid"/>
           </a:ln>
         </p:spPr>
+        <p:txBody>
+          <a:bodyPr/>
+          <a:lstStyle/>
+          <a:p>
+            <a:endParaRPr lang="en-GH"/>
+          </a:p>
+        </p:txBody>
       </p:sp>
       <p:sp>
         <p:nvSpPr>
@@ -5341,7 +5363,7 @@
           <a:bodyPr wrap="square" lIns="0" tIns="0" rIns="0" bIns="0" rtlCol="0" anchor="ctr"/>
           <a:lstStyle/>
           <a:p>
-            <a:pPr indent="0" marL="0">
+            <a:pPr marL="0" indent="0">
               <a:buNone/>
             </a:pPr>
             <a:r>
@@ -5377,7 +5399,7 @@
           <a:bodyPr wrap="square" lIns="0" tIns="0" rIns="0" bIns="0" rtlCol="0" anchor="ctr"/>
           <a:lstStyle/>
           <a:p>
-            <a:pPr indent="0" marL="0">
+            <a:pPr marL="0" indent="0">
               <a:buNone/>
             </a:pPr>
             <a:r>
@@ -5416,6 +5438,13 @@
             <a:prstDash val="solid"/>
           </a:ln>
         </p:spPr>
+        <p:txBody>
+          <a:bodyPr/>
+          <a:lstStyle/>
+          <a:p>
+            <a:endParaRPr lang="en-GH"/>
+          </a:p>
+        </p:txBody>
       </p:sp>
       <p:sp>
         <p:nvSpPr>
@@ -5438,7 +5467,7 @@
           <a:bodyPr wrap="square" lIns="0" tIns="0" rIns="0" bIns="0" rtlCol="0" anchor="ctr"/>
           <a:lstStyle/>
           <a:p>
-            <a:pPr algn="ctr" indent="0" marL="0">
+            <a:pPr marL="0" indent="0" algn="ctr">
               <a:buNone/>
             </a:pPr>
             <a:r>
@@ -5477,6 +5506,13 @@
             <a:prstDash val="solid"/>
           </a:ln>
         </p:spPr>
+        <p:txBody>
+          <a:bodyPr/>
+          <a:lstStyle/>
+          <a:p>
+            <a:endParaRPr lang="en-GH"/>
+          </a:p>
+        </p:txBody>
       </p:sp>
       <p:sp>
         <p:nvSpPr>
@@ -5499,7 +5535,7 @@
           <a:bodyPr wrap="square" lIns="0" tIns="0" rIns="0" bIns="0" rtlCol="0" anchor="ctr"/>
           <a:lstStyle/>
           <a:p>
-            <a:pPr algn="ctr" indent="0" marL="0">
+            <a:pPr marL="0" indent="0" algn="ctr">
               <a:buNone/>
             </a:pPr>
             <a:r>
@@ -5538,6 +5574,13 @@
             <a:prstDash val="solid"/>
           </a:ln>
         </p:spPr>
+        <p:txBody>
+          <a:bodyPr/>
+          <a:lstStyle/>
+          <a:p>
+            <a:endParaRPr lang="en-GH"/>
+          </a:p>
+        </p:txBody>
       </p:sp>
       <p:sp>
         <p:nvSpPr>
@@ -5563,6 +5606,13 @@
             <a:prstDash val="solid"/>
           </a:ln>
         </p:spPr>
+        <p:txBody>
+          <a:bodyPr/>
+          <a:lstStyle/>
+          <a:p>
+            <a:endParaRPr lang="en-GH"/>
+          </a:p>
+        </p:txBody>
       </p:sp>
       <p:sp>
         <p:nvSpPr>
@@ -5585,7 +5635,7 @@
           <a:bodyPr wrap="square" lIns="0" tIns="0" rIns="0" bIns="0" rtlCol="0" anchor="ctr"/>
           <a:lstStyle/>
           <a:p>
-            <a:pPr indent="0" marL="0">
+            <a:pPr marL="0" indent="0">
               <a:buNone/>
             </a:pPr>
             <a:r>
@@ -5621,7 +5671,7 @@
           <a:bodyPr wrap="square" lIns="0" tIns="0" rIns="0" bIns="0" rtlCol="0" anchor="ctr"/>
           <a:lstStyle/>
           <a:p>
-            <a:pPr indent="0" marL="0">
+            <a:pPr marL="0" indent="0">
               <a:buNone/>
             </a:pPr>
             <a:r>
@@ -5660,6 +5710,13 @@
             <a:prstDash val="solid"/>
           </a:ln>
         </p:spPr>
+        <p:txBody>
+          <a:bodyPr/>
+          <a:lstStyle/>
+          <a:p>
+            <a:endParaRPr lang="en-GH"/>
+          </a:p>
+        </p:txBody>
       </p:sp>
       <p:sp>
         <p:nvSpPr>
@@ -5682,7 +5739,7 @@
           <a:bodyPr wrap="square" lIns="0" tIns="0" rIns="0" bIns="0" rtlCol="0" anchor="ctr"/>
           <a:lstStyle/>
           <a:p>
-            <a:pPr algn="ctr" indent="0" marL="0">
+            <a:pPr marL="0" indent="0" algn="ctr">
               <a:buNone/>
             </a:pPr>
             <a:r>
@@ -5721,6 +5778,13 @@
             <a:prstDash val="solid"/>
           </a:ln>
         </p:spPr>
+        <p:txBody>
+          <a:bodyPr/>
+          <a:lstStyle/>
+          <a:p>
+            <a:endParaRPr lang="en-GH"/>
+          </a:p>
+        </p:txBody>
       </p:sp>
       <p:sp>
         <p:nvSpPr>
@@ -5743,7 +5807,7 @@
           <a:bodyPr wrap="square" lIns="0" tIns="0" rIns="0" bIns="0" rtlCol="0" anchor="ctr"/>
           <a:lstStyle/>
           <a:p>
-            <a:pPr algn="ctr" indent="0" marL="0">
+            <a:pPr marL="0" indent="0" algn="ctr">
               <a:buNone/>
             </a:pPr>
             <a:r>
@@ -5782,6 +5846,13 @@
             <a:prstDash val="solid"/>
           </a:ln>
         </p:spPr>
+        <p:txBody>
+          <a:bodyPr/>
+          <a:lstStyle/>
+          <a:p>
+            <a:endParaRPr lang="en-GH"/>
+          </a:p>
+        </p:txBody>
       </p:sp>
       <p:sp>
         <p:nvSpPr>
@@ -5807,6 +5878,13 @@
             <a:prstDash val="solid"/>
           </a:ln>
         </p:spPr>
+        <p:txBody>
+          <a:bodyPr/>
+          <a:lstStyle/>
+          <a:p>
+            <a:endParaRPr lang="en-GH"/>
+          </a:p>
+        </p:txBody>
       </p:sp>
       <p:sp>
         <p:nvSpPr>
@@ -5829,7 +5907,7 @@
           <a:bodyPr wrap="square" lIns="0" tIns="0" rIns="0" bIns="0" rtlCol="0" anchor="ctr"/>
           <a:lstStyle/>
           <a:p>
-            <a:pPr indent="0" marL="0">
+            <a:pPr marL="0" indent="0">
               <a:buNone/>
             </a:pPr>
             <a:r>
@@ -5865,7 +5943,7 @@
           <a:bodyPr wrap="square" lIns="0" tIns="0" rIns="0" bIns="0" rtlCol="0" anchor="ctr"/>
           <a:lstStyle/>
           <a:p>
-            <a:pPr indent="0" marL="0">
+            <a:pPr marL="0" indent="0">
               <a:buNone/>
             </a:pPr>
             <a:r>
@@ -5904,6 +5982,13 @@
             <a:prstDash val="solid"/>
           </a:ln>
         </p:spPr>
+        <p:txBody>
+          <a:bodyPr/>
+          <a:lstStyle/>
+          <a:p>
+            <a:endParaRPr lang="en-GH"/>
+          </a:p>
+        </p:txBody>
       </p:sp>
       <p:sp>
         <p:nvSpPr>
@@ -5926,7 +6011,7 @@
           <a:bodyPr wrap="square" lIns="0" tIns="0" rIns="0" bIns="0" rtlCol="0" anchor="ctr"/>
           <a:lstStyle/>
           <a:p>
-            <a:pPr algn="ctr" indent="0" marL="0">
+            <a:pPr marL="0" indent="0" algn="ctr">
               <a:buNone/>
             </a:pPr>
             <a:r>
@@ -5965,6 +6050,13 @@
             <a:prstDash val="solid"/>
           </a:ln>
         </p:spPr>
+        <p:txBody>
+          <a:bodyPr/>
+          <a:lstStyle/>
+          <a:p>
+            <a:endParaRPr lang="en-GH"/>
+          </a:p>
+        </p:txBody>
       </p:sp>
       <p:sp>
         <p:nvSpPr>
@@ -5987,7 +6079,7 @@
           <a:bodyPr wrap="square" lIns="0" tIns="0" rIns="0" bIns="0" rtlCol="0" anchor="ctr"/>
           <a:lstStyle/>
           <a:p>
-            <a:pPr algn="ctr" indent="0" marL="0">
+            <a:pPr marL="0" indent="0" algn="ctr">
               <a:buNone/>
             </a:pPr>
             <a:r>
@@ -6018,6 +6110,7 @@
         <a:solidFill>
           <a:srgbClr val="F0F4F8"/>
         </a:solidFill>
+        <a:effectLst/>
       </p:bgPr>
     </p:bg>
     <p:spTree>
@@ -6055,7 +6148,7 @@
           <a:bodyPr wrap="square" lIns="0" tIns="0" rIns="0" bIns="0" rtlCol="0" anchor="ctr"/>
           <a:lstStyle/>
           <a:p>
-            <a:pPr indent="0" marL="0">
+            <a:pPr marL="0" indent="0">
               <a:buNone/>
             </a:pPr>
             <a:r>
@@ -6094,6 +6187,13 @@
             <a:prstDash val="solid"/>
           </a:ln>
         </p:spPr>
+        <p:txBody>
+          <a:bodyPr/>
+          <a:lstStyle/>
+          <a:p>
+            <a:endParaRPr lang="en-GH"/>
+          </a:p>
+        </p:txBody>
       </p:sp>
       <p:sp>
         <p:nvSpPr>
@@ -6116,7 +6216,7 @@
           <a:bodyPr wrap="square" lIns="0" tIns="0" rIns="0" bIns="0" rtlCol="0" anchor="ctr"/>
           <a:lstStyle/>
           <a:p>
-            <a:pPr algn="ctr" indent="0" marL="0">
+            <a:pPr marL="0" indent="0" algn="ctr">
               <a:buNone/>
             </a:pPr>
             <a:r>
@@ -6155,6 +6255,13 @@
             <a:prstDash val="solid"/>
           </a:ln>
         </p:spPr>
+        <p:txBody>
+          <a:bodyPr/>
+          <a:lstStyle/>
+          <a:p>
+            <a:endParaRPr lang="en-GH"/>
+          </a:p>
+        </p:txBody>
       </p:sp>
       <p:sp>
         <p:nvSpPr>
@@ -6177,7 +6284,7 @@
           <a:bodyPr wrap="square" lIns="0" tIns="0" rIns="0" bIns="0" rtlCol="0" anchor="ctr"/>
           <a:lstStyle/>
           <a:p>
-            <a:pPr algn="ctr" indent="0" marL="0">
+            <a:pPr marL="0" indent="0" algn="ctr">
               <a:buNone/>
             </a:pPr>
             <a:r>
@@ -6216,6 +6323,13 @@
             <a:prstDash val="solid"/>
           </a:ln>
         </p:spPr>
+        <p:txBody>
+          <a:bodyPr/>
+          <a:lstStyle/>
+          <a:p>
+            <a:endParaRPr lang="en-GH"/>
+          </a:p>
+        </p:txBody>
       </p:sp>
       <p:sp>
         <p:nvSpPr>
@@ -6238,7 +6352,7 @@
           <a:bodyPr wrap="square" lIns="0" tIns="0" rIns="0" bIns="0" rtlCol="0" anchor="ctr"/>
           <a:lstStyle/>
           <a:p>
-            <a:pPr algn="ctr" indent="0" marL="0">
+            <a:pPr marL="0" indent="0" algn="ctr">
               <a:buNone/>
             </a:pPr>
             <a:r>
@@ -6277,6 +6391,13 @@
             <a:prstDash val="solid"/>
           </a:ln>
         </p:spPr>
+        <p:txBody>
+          <a:bodyPr/>
+          <a:lstStyle/>
+          <a:p>
+            <a:endParaRPr lang="en-GH"/>
+          </a:p>
+        </p:txBody>
       </p:sp>
       <p:sp>
         <p:nvSpPr>
@@ -6299,7 +6420,7 @@
           <a:bodyPr wrap="square" lIns="0" tIns="0" rIns="0" bIns="0" rtlCol="0" anchor="ctr"/>
           <a:lstStyle/>
           <a:p>
-            <a:pPr algn="ctr" indent="0" marL="0">
+            <a:pPr marL="0" indent="0" algn="ctr">
               <a:buNone/>
             </a:pPr>
             <a:r>
@@ -6338,6 +6459,13 @@
             <a:prstDash val="solid"/>
           </a:ln>
         </p:spPr>
+        <p:txBody>
+          <a:bodyPr/>
+          <a:lstStyle/>
+          <a:p>
+            <a:endParaRPr lang="en-GH"/>
+          </a:p>
+        </p:txBody>
       </p:sp>
       <p:sp>
         <p:nvSpPr>
@@ -6360,7 +6488,7 @@
           <a:bodyPr wrap="square" lIns="0" tIns="0" rIns="0" bIns="0" rtlCol="0" anchor="ctr"/>
           <a:lstStyle/>
           <a:p>
-            <a:pPr algn="ctr" indent="0" marL="0">
+            <a:pPr marL="0" indent="0" algn="ctr">
               <a:buNone/>
             </a:pPr>
             <a:r>
@@ -6399,6 +6527,13 @@
             <a:prstDash val="solid"/>
           </a:ln>
         </p:spPr>
+        <p:txBody>
+          <a:bodyPr/>
+          <a:lstStyle/>
+          <a:p>
+            <a:endParaRPr lang="en-GH"/>
+          </a:p>
+        </p:txBody>
       </p:sp>
       <p:sp>
         <p:nvSpPr>
@@ -6421,7 +6556,7 @@
           <a:bodyPr wrap="square" lIns="0" tIns="0" rIns="0" bIns="0" rtlCol="0" anchor="ctr"/>
           <a:lstStyle/>
           <a:p>
-            <a:pPr algn="ctr" indent="0" marL="0">
+            <a:pPr marL="0" indent="0" algn="ctr">
               <a:buNone/>
             </a:pPr>
             <a:r>
@@ -6460,6 +6595,13 @@
             <a:prstDash val="solid"/>
           </a:ln>
         </p:spPr>
+        <p:txBody>
+          <a:bodyPr/>
+          <a:lstStyle/>
+          <a:p>
+            <a:endParaRPr lang="en-GH"/>
+          </a:p>
+        </p:txBody>
       </p:sp>
       <p:sp>
         <p:nvSpPr>
@@ -6482,7 +6624,7 @@
           <a:bodyPr wrap="square" lIns="76200" tIns="76200" rIns="76200" bIns="76200" rtlCol="0" anchor="ctr"/>
           <a:lstStyle/>
           <a:p>
-            <a:pPr algn="l" indent="0" marL="0">
+            <a:pPr marL="0" indent="0" algn="l">
               <a:buNone/>
             </a:pPr>
             <a:r>
@@ -6521,6 +6663,13 @@
             <a:prstDash val="solid"/>
           </a:ln>
         </p:spPr>
+        <p:txBody>
+          <a:bodyPr/>
+          <a:lstStyle/>
+          <a:p>
+            <a:endParaRPr lang="en-GH"/>
+          </a:p>
+        </p:txBody>
       </p:sp>
       <p:sp>
         <p:nvSpPr>
@@ -6543,7 +6692,7 @@
           <a:bodyPr wrap="square" lIns="0" tIns="0" rIns="0" bIns="0" rtlCol="0" anchor="ctr"/>
           <a:lstStyle/>
           <a:p>
-            <a:pPr algn="ctr" indent="0" marL="0">
+            <a:pPr marL="0" indent="0" algn="ctr">
               <a:buNone/>
             </a:pPr>
             <a:r>
@@ -6582,6 +6731,13 @@
             <a:prstDash val="solid"/>
           </a:ln>
         </p:spPr>
+        <p:txBody>
+          <a:bodyPr/>
+          <a:lstStyle/>
+          <a:p>
+            <a:endParaRPr lang="en-GH"/>
+          </a:p>
+        </p:txBody>
       </p:sp>
       <p:sp>
         <p:nvSpPr>
@@ -6604,7 +6760,7 @@
           <a:bodyPr wrap="square" lIns="0" tIns="0" rIns="0" bIns="0" rtlCol="0" anchor="ctr"/>
           <a:lstStyle/>
           <a:p>
-            <a:pPr algn="ctr" indent="0" marL="0">
+            <a:pPr marL="0" indent="0" algn="ctr">
               <a:buNone/>
             </a:pPr>
             <a:r>
@@ -6643,6 +6799,13 @@
             <a:prstDash val="solid"/>
           </a:ln>
         </p:spPr>
+        <p:txBody>
+          <a:bodyPr/>
+          <a:lstStyle/>
+          <a:p>
+            <a:endParaRPr lang="en-GH"/>
+          </a:p>
+        </p:txBody>
       </p:sp>
       <p:sp>
         <p:nvSpPr>
@@ -6665,7 +6828,7 @@
           <a:bodyPr wrap="square" lIns="0" tIns="0" rIns="0" bIns="0" rtlCol="0" anchor="ctr"/>
           <a:lstStyle/>
           <a:p>
-            <a:pPr algn="ctr" indent="0" marL="0">
+            <a:pPr marL="0" indent="0" algn="ctr">
               <a:buNone/>
             </a:pPr>
             <a:r>
@@ -6704,6 +6867,13 @@
             <a:prstDash val="solid"/>
           </a:ln>
         </p:spPr>
+        <p:txBody>
+          <a:bodyPr/>
+          <a:lstStyle/>
+          <a:p>
+            <a:endParaRPr lang="en-GH"/>
+          </a:p>
+        </p:txBody>
       </p:sp>
       <p:sp>
         <p:nvSpPr>
@@ -6726,7 +6896,7 @@
           <a:bodyPr wrap="square" lIns="0" tIns="0" rIns="0" bIns="0" rtlCol="0" anchor="ctr"/>
           <a:lstStyle/>
           <a:p>
-            <a:pPr algn="ctr" indent="0" marL="0">
+            <a:pPr marL="0" indent="0" algn="ctr">
               <a:buNone/>
             </a:pPr>
             <a:r>
@@ -6765,6 +6935,13 @@
             <a:prstDash val="solid"/>
           </a:ln>
         </p:spPr>
+        <p:txBody>
+          <a:bodyPr/>
+          <a:lstStyle/>
+          <a:p>
+            <a:endParaRPr lang="en-GH"/>
+          </a:p>
+        </p:txBody>
       </p:sp>
       <p:sp>
         <p:nvSpPr>
@@ -6787,7 +6964,7 @@
           <a:bodyPr wrap="square" lIns="0" tIns="0" rIns="0" bIns="0" rtlCol="0" anchor="ctr"/>
           <a:lstStyle/>
           <a:p>
-            <a:pPr algn="ctr" indent="0" marL="0">
+            <a:pPr marL="0" indent="0" algn="ctr">
               <a:buNone/>
             </a:pPr>
             <a:r>
@@ -6826,6 +7003,13 @@
             <a:prstDash val="solid"/>
           </a:ln>
         </p:spPr>
+        <p:txBody>
+          <a:bodyPr/>
+          <a:lstStyle/>
+          <a:p>
+            <a:endParaRPr lang="en-GH"/>
+          </a:p>
+        </p:txBody>
       </p:sp>
       <p:sp>
         <p:nvSpPr>
@@ -6848,7 +7032,7 @@
           <a:bodyPr wrap="square" lIns="76200" tIns="76200" rIns="76200" bIns="76200" rtlCol="0" anchor="ctr"/>
           <a:lstStyle/>
           <a:p>
-            <a:pPr algn="l" indent="0" marL="0">
+            <a:pPr marL="0" indent="0" algn="l">
               <a:buNone/>
             </a:pPr>
             <a:r>
@@ -6887,6 +7071,13 @@
             <a:prstDash val="solid"/>
           </a:ln>
         </p:spPr>
+        <p:txBody>
+          <a:bodyPr/>
+          <a:lstStyle/>
+          <a:p>
+            <a:endParaRPr lang="en-GH"/>
+          </a:p>
+        </p:txBody>
       </p:sp>
       <p:sp>
         <p:nvSpPr>
@@ -6909,7 +7100,7 @@
           <a:bodyPr wrap="square" lIns="0" tIns="0" rIns="0" bIns="0" rtlCol="0" anchor="ctr"/>
           <a:lstStyle/>
           <a:p>
-            <a:pPr algn="ctr" indent="0" marL="0">
+            <a:pPr marL="0" indent="0" algn="ctr">
               <a:buNone/>
             </a:pPr>
             <a:r>
@@ -6948,6 +7139,13 @@
             <a:prstDash val="solid"/>
           </a:ln>
         </p:spPr>
+        <p:txBody>
+          <a:bodyPr/>
+          <a:lstStyle/>
+          <a:p>
+            <a:endParaRPr lang="en-GH"/>
+          </a:p>
+        </p:txBody>
       </p:sp>
       <p:sp>
         <p:nvSpPr>
@@ -6970,7 +7168,7 @@
           <a:bodyPr wrap="square" lIns="0" tIns="0" rIns="0" bIns="0" rtlCol="0" anchor="ctr"/>
           <a:lstStyle/>
           <a:p>
-            <a:pPr algn="ctr" indent="0" marL="0">
+            <a:pPr marL="0" indent="0" algn="ctr">
               <a:buNone/>
             </a:pPr>
             <a:r>
@@ -7009,6 +7207,13 @@
             <a:prstDash val="solid"/>
           </a:ln>
         </p:spPr>
+        <p:txBody>
+          <a:bodyPr/>
+          <a:lstStyle/>
+          <a:p>
+            <a:endParaRPr lang="en-GH"/>
+          </a:p>
+        </p:txBody>
       </p:sp>
       <p:sp>
         <p:nvSpPr>
@@ -7031,7 +7236,7 @@
           <a:bodyPr wrap="square" lIns="0" tIns="0" rIns="0" bIns="0" rtlCol="0" anchor="ctr"/>
           <a:lstStyle/>
           <a:p>
-            <a:pPr algn="ctr" indent="0" marL="0">
+            <a:pPr marL="0" indent="0" algn="ctr">
               <a:buNone/>
             </a:pPr>
             <a:r>
@@ -7070,6 +7275,13 @@
             <a:prstDash val="solid"/>
           </a:ln>
         </p:spPr>
+        <p:txBody>
+          <a:bodyPr/>
+          <a:lstStyle/>
+          <a:p>
+            <a:endParaRPr lang="en-GH"/>
+          </a:p>
+        </p:txBody>
       </p:sp>
       <p:sp>
         <p:nvSpPr>
@@ -7092,7 +7304,7 @@
           <a:bodyPr wrap="square" lIns="0" tIns="0" rIns="0" bIns="0" rtlCol="0" anchor="ctr"/>
           <a:lstStyle/>
           <a:p>
-            <a:pPr algn="ctr" indent="0" marL="0">
+            <a:pPr marL="0" indent="0" algn="ctr">
               <a:buNone/>
             </a:pPr>
             <a:r>
@@ -7131,6 +7343,13 @@
             <a:prstDash val="solid"/>
           </a:ln>
         </p:spPr>
+        <p:txBody>
+          <a:bodyPr/>
+          <a:lstStyle/>
+          <a:p>
+            <a:endParaRPr lang="en-GH"/>
+          </a:p>
+        </p:txBody>
       </p:sp>
       <p:sp>
         <p:nvSpPr>
@@ -7153,7 +7372,7 @@
           <a:bodyPr wrap="square" lIns="0" tIns="0" rIns="0" bIns="0" rtlCol="0" anchor="ctr"/>
           <a:lstStyle/>
           <a:p>
-            <a:pPr algn="ctr" indent="0" marL="0">
+            <a:pPr marL="0" indent="0" algn="ctr">
               <a:buNone/>
             </a:pPr>
             <a:r>
@@ -7192,6 +7411,13 @@
             <a:prstDash val="solid"/>
           </a:ln>
         </p:spPr>
+        <p:txBody>
+          <a:bodyPr/>
+          <a:lstStyle/>
+          <a:p>
+            <a:endParaRPr lang="en-GH"/>
+          </a:p>
+        </p:txBody>
       </p:sp>
       <p:sp>
         <p:nvSpPr>
@@ -7214,7 +7440,7 @@
           <a:bodyPr wrap="square" lIns="76200" tIns="76200" rIns="76200" bIns="76200" rtlCol="0" anchor="ctr"/>
           <a:lstStyle/>
           <a:p>
-            <a:pPr algn="l" indent="0" marL="0">
+            <a:pPr marL="0" indent="0" algn="l">
               <a:buNone/>
             </a:pPr>
             <a:r>
@@ -7253,6 +7479,13 @@
             <a:prstDash val="solid"/>
           </a:ln>
         </p:spPr>
+        <p:txBody>
+          <a:bodyPr/>
+          <a:lstStyle/>
+          <a:p>
+            <a:endParaRPr lang="en-GH"/>
+          </a:p>
+        </p:txBody>
       </p:sp>
       <p:sp>
         <p:nvSpPr>
@@ -7275,7 +7508,7 @@
           <a:bodyPr wrap="square" lIns="0" tIns="0" rIns="0" bIns="0" rtlCol="0" anchor="ctr"/>
           <a:lstStyle/>
           <a:p>
-            <a:pPr algn="ctr" indent="0" marL="0">
+            <a:pPr marL="0" indent="0" algn="ctr">
               <a:buNone/>
             </a:pPr>
             <a:r>
@@ -7314,6 +7547,13 @@
             <a:prstDash val="solid"/>
           </a:ln>
         </p:spPr>
+        <p:txBody>
+          <a:bodyPr/>
+          <a:lstStyle/>
+          <a:p>
+            <a:endParaRPr lang="en-GH"/>
+          </a:p>
+        </p:txBody>
       </p:sp>
       <p:sp>
         <p:nvSpPr>
@@ -7336,7 +7576,7 @@
           <a:bodyPr wrap="square" lIns="0" tIns="0" rIns="0" bIns="0" rtlCol="0" anchor="ctr"/>
           <a:lstStyle/>
           <a:p>
-            <a:pPr algn="ctr" indent="0" marL="0">
+            <a:pPr marL="0" indent="0" algn="ctr">
               <a:buNone/>
             </a:pPr>
             <a:r>
@@ -7375,6 +7615,13 @@
             <a:prstDash val="solid"/>
           </a:ln>
         </p:spPr>
+        <p:txBody>
+          <a:bodyPr/>
+          <a:lstStyle/>
+          <a:p>
+            <a:endParaRPr lang="en-GH"/>
+          </a:p>
+        </p:txBody>
       </p:sp>
       <p:sp>
         <p:nvSpPr>
@@ -7397,7 +7644,7 @@
           <a:bodyPr wrap="square" lIns="0" tIns="0" rIns="0" bIns="0" rtlCol="0" anchor="ctr"/>
           <a:lstStyle/>
           <a:p>
-            <a:pPr algn="ctr" indent="0" marL="0">
+            <a:pPr marL="0" indent="0" algn="ctr">
               <a:buNone/>
             </a:pPr>
             <a:r>
@@ -7436,6 +7683,13 @@
             <a:prstDash val="solid"/>
           </a:ln>
         </p:spPr>
+        <p:txBody>
+          <a:bodyPr/>
+          <a:lstStyle/>
+          <a:p>
+            <a:endParaRPr lang="en-GH"/>
+          </a:p>
+        </p:txBody>
       </p:sp>
       <p:sp>
         <p:nvSpPr>
@@ -7458,7 +7712,7 @@
           <a:bodyPr wrap="square" lIns="0" tIns="0" rIns="0" bIns="0" rtlCol="0" anchor="ctr"/>
           <a:lstStyle/>
           <a:p>
-            <a:pPr algn="ctr" indent="0" marL="0">
+            <a:pPr marL="0" indent="0" algn="ctr">
               <a:buNone/>
             </a:pPr>
             <a:r>
@@ -7497,6 +7751,13 @@
             <a:prstDash val="solid"/>
           </a:ln>
         </p:spPr>
+        <p:txBody>
+          <a:bodyPr/>
+          <a:lstStyle/>
+          <a:p>
+            <a:endParaRPr lang="en-GH"/>
+          </a:p>
+        </p:txBody>
       </p:sp>
       <p:sp>
         <p:nvSpPr>
@@ -7519,7 +7780,7 @@
           <a:bodyPr wrap="square" lIns="0" tIns="0" rIns="0" bIns="0" rtlCol="0" anchor="ctr"/>
           <a:lstStyle/>
           <a:p>
-            <a:pPr algn="ctr" indent="0" marL="0">
+            <a:pPr marL="0" indent="0" algn="ctr">
               <a:buNone/>
             </a:pPr>
             <a:r>
@@ -7555,7 +7816,7 @@
           <a:bodyPr wrap="square" lIns="0" tIns="0" rIns="0" bIns="0" rtlCol="0" anchor="ctr"/>
           <a:lstStyle/>
           <a:p>
-            <a:pPr indent="0" marL="0">
+            <a:pPr marL="0" indent="0">
               <a:buNone/>
             </a:pPr>
             <a:r>
@@ -7591,7 +7852,7 @@
           <a:bodyPr wrap="square" lIns="0" tIns="0" rIns="0" bIns="0" rtlCol="0" anchor="ctr"/>
           <a:lstStyle/>
           <a:p>
-            <a:pPr indent="0" marL="0">
+            <a:pPr marL="0" indent="0">
               <a:buNone/>
             </a:pPr>
             <a:r>
@@ -7622,6 +7883,7 @@
         <a:solidFill>
           <a:srgbClr val="F0F4F8"/>
         </a:solidFill>
+        <a:effectLst/>
       </p:bgPr>
     </p:bg>
     <p:spTree>
@@ -7659,7 +7921,7 @@
           <a:bodyPr wrap="square" lIns="0" tIns="0" rIns="0" bIns="0" rtlCol="0" anchor="ctr"/>
           <a:lstStyle/>
           <a:p>
-            <a:pPr indent="0" marL="0">
+            <a:pPr marL="0" indent="0">
               <a:buNone/>
             </a:pPr>
             <a:r>
@@ -7698,6 +7960,13 @@
             <a:prstDash val="solid"/>
           </a:ln>
         </p:spPr>
+        <p:txBody>
+          <a:bodyPr/>
+          <a:lstStyle/>
+          <a:p>
+            <a:endParaRPr lang="en-GH"/>
+          </a:p>
+        </p:txBody>
       </p:sp>
       <p:sp>
         <p:nvSpPr>
@@ -7720,7 +7989,7 @@
           <a:bodyPr wrap="square" lIns="0" tIns="0" rIns="0" bIns="0" rtlCol="0" anchor="ctr"/>
           <a:lstStyle/>
           <a:p>
-            <a:pPr algn="ctr" indent="0" marL="0">
+            <a:pPr marL="0" indent="0" algn="ctr">
               <a:buNone/>
             </a:pPr>
             <a:r>
@@ -7759,6 +8028,13 @@
             <a:prstDash val="solid"/>
           </a:ln>
         </p:spPr>
+        <p:txBody>
+          <a:bodyPr/>
+          <a:lstStyle/>
+          <a:p>
+            <a:endParaRPr lang="en-GH"/>
+          </a:p>
+        </p:txBody>
       </p:sp>
       <p:sp>
         <p:nvSpPr>
@@ -7781,7 +8057,7 @@
           <a:bodyPr wrap="square" lIns="0" tIns="0" rIns="0" bIns="0" rtlCol="0" anchor="ctr"/>
           <a:lstStyle/>
           <a:p>
-            <a:pPr indent="0" marL="0">
+            <a:pPr marL="0" indent="0">
               <a:buNone/>
             </a:pPr>
             <a:r>
@@ -7817,7 +8093,7 @@
           <a:bodyPr wrap="square" lIns="0" tIns="0" rIns="0" bIns="0" rtlCol="0" anchor="ctr"/>
           <a:lstStyle/>
           <a:p>
-            <a:pPr indent="0" marL="0">
+            <a:pPr marL="0" indent="0">
               <a:buNone/>
             </a:pPr>
             <a:r>
@@ -7856,6 +8132,13 @@
             <a:prstDash val="solid"/>
           </a:ln>
         </p:spPr>
+        <p:txBody>
+          <a:bodyPr/>
+          <a:lstStyle/>
+          <a:p>
+            <a:endParaRPr lang="en-GH"/>
+          </a:p>
+        </p:txBody>
       </p:sp>
       <p:sp>
         <p:nvSpPr>
@@ -7878,7 +8161,7 @@
           <a:bodyPr wrap="square" lIns="0" tIns="0" rIns="0" bIns="0" rtlCol="0" anchor="ctr"/>
           <a:lstStyle/>
           <a:p>
-            <a:pPr indent="0" marL="0">
+            <a:pPr marL="0" indent="0">
               <a:buNone/>
             </a:pPr>
             <a:r>
@@ -7914,7 +8197,7 @@
           <a:bodyPr wrap="square" lIns="0" tIns="0" rIns="0" bIns="0" rtlCol="0" anchor="ctr"/>
           <a:lstStyle/>
           <a:p>
-            <a:pPr indent="0" marL="0">
+            <a:pPr marL="0" indent="0">
               <a:buNone/>
             </a:pPr>
             <a:r>
@@ -7953,6 +8236,13 @@
             <a:prstDash val="solid"/>
           </a:ln>
         </p:spPr>
+        <p:txBody>
+          <a:bodyPr/>
+          <a:lstStyle/>
+          <a:p>
+            <a:endParaRPr lang="en-GH"/>
+          </a:p>
+        </p:txBody>
       </p:sp>
       <p:sp>
         <p:nvSpPr>
@@ -7975,7 +8265,7 @@
           <a:bodyPr wrap="square" lIns="0" tIns="0" rIns="0" bIns="0" rtlCol="0" anchor="ctr"/>
           <a:lstStyle/>
           <a:p>
-            <a:pPr indent="0" marL="0">
+            <a:pPr marL="0" indent="0">
               <a:buNone/>
             </a:pPr>
             <a:r>
@@ -8011,7 +8301,7 @@
           <a:bodyPr wrap="square" lIns="0" tIns="0" rIns="0" bIns="0" rtlCol="0" anchor="ctr"/>
           <a:lstStyle/>
           <a:p>
-            <a:pPr indent="0" marL="0">
+            <a:pPr marL="0" indent="0">
               <a:buNone/>
             </a:pPr>
             <a:r>
@@ -8050,6 +8340,13 @@
             <a:prstDash val="solid"/>
           </a:ln>
         </p:spPr>
+        <p:txBody>
+          <a:bodyPr/>
+          <a:lstStyle/>
+          <a:p>
+            <a:endParaRPr lang="en-GH"/>
+          </a:p>
+        </p:txBody>
       </p:sp>
       <p:sp>
         <p:nvSpPr>
@@ -8072,7 +8369,7 @@
           <a:bodyPr wrap="square" lIns="0" tIns="0" rIns="0" bIns="0" rtlCol="0" anchor="ctr"/>
           <a:lstStyle/>
           <a:p>
-            <a:pPr indent="0" marL="0">
+            <a:pPr marL="0" indent="0">
               <a:buNone/>
             </a:pPr>
             <a:r>
@@ -8108,7 +8405,7 @@
           <a:bodyPr wrap="square" lIns="0" tIns="0" rIns="0" bIns="0" rtlCol="0" anchor="ctr"/>
           <a:lstStyle/>
           <a:p>
-            <a:pPr indent="0" marL="0">
+            <a:pPr marL="0" indent="0">
               <a:buNone/>
             </a:pPr>
             <a:r>
@@ -8147,6 +8444,13 @@
             <a:prstDash val="solid"/>
           </a:ln>
         </p:spPr>
+        <p:txBody>
+          <a:bodyPr/>
+          <a:lstStyle/>
+          <a:p>
+            <a:endParaRPr lang="en-GH"/>
+          </a:p>
+        </p:txBody>
       </p:sp>
       <p:sp>
         <p:nvSpPr>
@@ -8169,7 +8473,7 @@
           <a:bodyPr wrap="square" lIns="0" tIns="0" rIns="0" bIns="0" rtlCol="0" anchor="ctr"/>
           <a:lstStyle/>
           <a:p>
-            <a:pPr indent="0" marL="0">
+            <a:pPr marL="0" indent="0">
               <a:buNone/>
             </a:pPr>
             <a:r>
@@ -8205,7 +8509,7 @@
           <a:bodyPr wrap="square" lIns="0" tIns="0" rIns="0" bIns="0" rtlCol="0" anchor="ctr"/>
           <a:lstStyle/>
           <a:p>
-            <a:pPr indent="0" marL="0">
+            <a:pPr marL="0" indent="0">
               <a:buNone/>
             </a:pPr>
             <a:r>
@@ -8244,6 +8548,13 @@
             <a:prstDash val="solid"/>
           </a:ln>
         </p:spPr>
+        <p:txBody>
+          <a:bodyPr/>
+          <a:lstStyle/>
+          <a:p>
+            <a:endParaRPr lang="en-GH"/>
+          </a:p>
+        </p:txBody>
       </p:sp>
       <p:sp>
         <p:nvSpPr>
@@ -8266,7 +8577,7 @@
           <a:bodyPr wrap="square" lIns="0" tIns="0" rIns="0" bIns="0" rtlCol="0" anchor="ctr"/>
           <a:lstStyle/>
           <a:p>
-            <a:pPr indent="0" marL="0">
+            <a:pPr marL="0" indent="0">
               <a:buNone/>
             </a:pPr>
             <a:r>
@@ -8302,7 +8613,7 @@
           <a:bodyPr wrap="square" lIns="0" tIns="0" rIns="0" bIns="0" rtlCol="0" anchor="ctr"/>
           <a:lstStyle/>
           <a:p>
-            <a:pPr indent="0" marL="0">
+            <a:pPr marL="0" indent="0">
               <a:buNone/>
             </a:pPr>
             <a:r>
@@ -8341,6 +8652,13 @@
             <a:prstDash val="solid"/>
           </a:ln>
         </p:spPr>
+        <p:txBody>
+          <a:bodyPr/>
+          <a:lstStyle/>
+          <a:p>
+            <a:endParaRPr lang="en-GH"/>
+          </a:p>
+        </p:txBody>
       </p:sp>
       <p:sp>
         <p:nvSpPr>
@@ -8363,7 +8681,7 @@
           <a:bodyPr wrap="square" lIns="0" tIns="0" rIns="0" bIns="0" rtlCol="0" anchor="ctr"/>
           <a:lstStyle/>
           <a:p>
-            <a:pPr algn="ctr" indent="0" marL="0">
+            <a:pPr marL="0" indent="0" algn="ctr">
               <a:buNone/>
             </a:pPr>
             <a:r>
@@ -8399,7 +8717,7 @@
           <a:bodyPr wrap="square" lIns="0" tIns="0" rIns="0" bIns="0" rtlCol="0" anchor="ctr"/>
           <a:lstStyle/>
           <a:p>
-            <a:pPr algn="ctr" indent="0" marL="0">
+            <a:pPr marL="0" indent="0" algn="ctr">
               <a:buNone/>
             </a:pPr>
             <a:r>
@@ -8438,6 +8756,13 @@
             <a:prstDash val="solid"/>
           </a:ln>
         </p:spPr>
+        <p:txBody>
+          <a:bodyPr/>
+          <a:lstStyle/>
+          <a:p>
+            <a:endParaRPr lang="en-GH"/>
+          </a:p>
+        </p:txBody>
       </p:sp>
       <p:sp>
         <p:nvSpPr>
@@ -8460,7 +8785,7 @@
           <a:bodyPr wrap="square" lIns="0" tIns="0" rIns="0" bIns="0" rtlCol="0" anchor="ctr"/>
           <a:lstStyle/>
           <a:p>
-            <a:pPr algn="ctr" indent="0" marL="0">
+            <a:pPr marL="0" indent="0" algn="ctr">
               <a:buNone/>
             </a:pPr>
             <a:r>
@@ -8496,7 +8821,7 @@
           <a:bodyPr wrap="square" lIns="0" tIns="0" rIns="0" bIns="0" rtlCol="0" anchor="ctr"/>
           <a:lstStyle/>
           <a:p>
-            <a:pPr algn="ctr" indent="0" marL="0">
+            <a:pPr marL="0" indent="0" algn="ctr">
               <a:buNone/>
             </a:pPr>
             <a:r>
@@ -8535,6 +8860,13 @@
             <a:prstDash val="solid"/>
           </a:ln>
         </p:spPr>
+        <p:txBody>
+          <a:bodyPr/>
+          <a:lstStyle/>
+          <a:p>
+            <a:endParaRPr lang="en-GH"/>
+          </a:p>
+        </p:txBody>
       </p:sp>
       <p:sp>
         <p:nvSpPr>
@@ -8557,7 +8889,7 @@
           <a:bodyPr wrap="square" lIns="0" tIns="0" rIns="0" bIns="0" rtlCol="0" anchor="ctr"/>
           <a:lstStyle/>
           <a:p>
-            <a:pPr algn="ctr" indent="0" marL="0">
+            <a:pPr marL="0" indent="0" algn="ctr">
               <a:buNone/>
             </a:pPr>
             <a:r>
@@ -8593,7 +8925,7 @@
           <a:bodyPr wrap="square" lIns="0" tIns="0" rIns="0" bIns="0" rtlCol="0" anchor="ctr"/>
           <a:lstStyle/>
           <a:p>
-            <a:pPr algn="ctr" indent="0" marL="0">
+            <a:pPr marL="0" indent="0" algn="ctr">
               <a:buNone/>
             </a:pPr>
             <a:r>
@@ -8632,6 +8964,13 @@
             <a:prstDash val="solid"/>
           </a:ln>
         </p:spPr>
+        <p:txBody>
+          <a:bodyPr/>
+          <a:lstStyle/>
+          <a:p>
+            <a:endParaRPr lang="en-GH"/>
+          </a:p>
+        </p:txBody>
       </p:sp>
       <p:sp>
         <p:nvSpPr>
@@ -8654,7 +8993,7 @@
           <a:bodyPr wrap="square" lIns="0" tIns="0" rIns="0" bIns="0" rtlCol="0" anchor="ctr"/>
           <a:lstStyle/>
           <a:p>
-            <a:pPr algn="ctr" indent="0" marL="0">
+            <a:pPr marL="0" indent="0" algn="ctr">
               <a:buNone/>
             </a:pPr>
             <a:r>
@@ -8690,7 +9029,7 @@
           <a:bodyPr wrap="square" lIns="0" tIns="0" rIns="0" bIns="0" rtlCol="0" anchor="ctr"/>
           <a:lstStyle/>
           <a:p>
-            <a:pPr algn="ctr" indent="0" marL="0">
+            <a:pPr marL="0" indent="0" algn="ctr">
               <a:buNone/>
             </a:pPr>
             <a:r>
@@ -8726,7 +9065,7 @@
           <a:bodyPr wrap="square" lIns="0" tIns="0" rIns="0" bIns="0" rtlCol="0" anchor="ctr"/>
           <a:lstStyle/>
           <a:p>
-            <a:pPr indent="0" marL="0">
+            <a:pPr marL="0" indent="0">
               <a:buNone/>
             </a:pPr>
             <a:r>
@@ -8757,6 +9096,7 @@
         <a:solidFill>
           <a:srgbClr val="F0F4F8"/>
         </a:solidFill>
+        <a:effectLst/>
       </p:bgPr>
     </p:bg>
     <p:spTree>
@@ -8794,7 +9134,7 @@
           <a:bodyPr wrap="square" lIns="0" tIns="0" rIns="0" bIns="0" rtlCol="0" anchor="ctr"/>
           <a:lstStyle/>
           <a:p>
-            <a:pPr indent="0" marL="0">
+            <a:pPr marL="0" indent="0">
               <a:buNone/>
             </a:pPr>
             <a:r>
@@ -8830,7 +9170,7 @@
           <a:bodyPr wrap="square" lIns="0" tIns="0" rIns="0" bIns="0" rtlCol="0" anchor="ctr"/>
           <a:lstStyle/>
           <a:p>
-            <a:pPr indent="0" marL="0">
+            <a:pPr marL="0" indent="0">
               <a:buNone/>
             </a:pPr>
             <a:r>
@@ -8869,6 +9209,13 @@
             <a:prstDash val="solid"/>
           </a:ln>
         </p:spPr>
+        <p:txBody>
+          <a:bodyPr/>
+          <a:lstStyle/>
+          <a:p>
+            <a:endParaRPr lang="en-GH"/>
+          </a:p>
+        </p:txBody>
       </p:sp>
       <p:sp>
         <p:nvSpPr>
@@ -8891,7 +9238,7 @@
           <a:bodyPr wrap="square" lIns="0" tIns="0" rIns="0" bIns="0" rtlCol="0" anchor="ctr"/>
           <a:lstStyle/>
           <a:p>
-            <a:pPr indent="0" marL="0">
+            <a:pPr marL="0" indent="0">
               <a:buNone/>
             </a:pPr>
             <a:r>
@@ -8927,7 +9274,7 @@
           <a:bodyPr wrap="square" lIns="0" tIns="0" rIns="0" bIns="0" rtlCol="0" anchor="ctr"/>
           <a:lstStyle/>
           <a:p>
-            <a:pPr indent="0" marL="0">
+            <a:pPr marL="0" indent="0">
               <a:buNone/>
             </a:pPr>
             <a:r>
@@ -8966,6 +9313,13 @@
             <a:prstDash val="solid"/>
           </a:ln>
         </p:spPr>
+        <p:txBody>
+          <a:bodyPr/>
+          <a:lstStyle/>
+          <a:p>
+            <a:endParaRPr lang="en-GH"/>
+          </a:p>
+        </p:txBody>
       </p:sp>
       <p:sp>
         <p:nvSpPr>
@@ -8988,7 +9342,7 @@
           <a:bodyPr wrap="square" lIns="0" tIns="0" rIns="0" bIns="0" rtlCol="0" anchor="ctr"/>
           <a:lstStyle/>
           <a:p>
-            <a:pPr indent="0" marL="0">
+            <a:pPr marL="0" indent="0">
               <a:buNone/>
             </a:pPr>
             <a:r>
@@ -9024,7 +9378,7 @@
           <a:bodyPr wrap="square" lIns="0" tIns="0" rIns="0" bIns="0" rtlCol="0" anchor="ctr"/>
           <a:lstStyle/>
           <a:p>
-            <a:pPr indent="0" marL="0">
+            <a:pPr marL="0" indent="0">
               <a:buNone/>
             </a:pPr>
             <a:r>
@@ -9063,6 +9417,13 @@
             <a:prstDash val="solid"/>
           </a:ln>
         </p:spPr>
+        <p:txBody>
+          <a:bodyPr/>
+          <a:lstStyle/>
+          <a:p>
+            <a:endParaRPr lang="en-GH"/>
+          </a:p>
+        </p:txBody>
       </p:sp>
       <p:sp>
         <p:nvSpPr>
@@ -9085,7 +9446,7 @@
           <a:bodyPr wrap="square" lIns="0" tIns="0" rIns="0" bIns="0" rtlCol="0" anchor="ctr"/>
           <a:lstStyle/>
           <a:p>
-            <a:pPr indent="0" marL="0">
+            <a:pPr marL="0" indent="0">
               <a:buNone/>
             </a:pPr>
             <a:r>
@@ -9121,7 +9482,7 @@
           <a:bodyPr wrap="square" lIns="0" tIns="0" rIns="0" bIns="0" rtlCol="0" anchor="ctr"/>
           <a:lstStyle/>
           <a:p>
-            <a:pPr indent="0" marL="0">
+            <a:pPr marL="0" indent="0">
               <a:buNone/>
             </a:pPr>
             <a:r>
@@ -9160,6 +9521,13 @@
             <a:prstDash val="solid"/>
           </a:ln>
         </p:spPr>
+        <p:txBody>
+          <a:bodyPr/>
+          <a:lstStyle/>
+          <a:p>
+            <a:endParaRPr lang="en-GH"/>
+          </a:p>
+        </p:txBody>
       </p:sp>
       <p:sp>
         <p:nvSpPr>
@@ -9182,7 +9550,7 @@
           <a:bodyPr wrap="square" lIns="0" tIns="0" rIns="0" bIns="0" rtlCol="0" anchor="ctr"/>
           <a:lstStyle/>
           <a:p>
-            <a:pPr indent="0" marL="0">
+            <a:pPr marL="0" indent="0">
               <a:buNone/>
             </a:pPr>
             <a:r>
@@ -9218,7 +9586,7 @@
           <a:bodyPr wrap="square" lIns="0" tIns="0" rIns="0" bIns="0" rtlCol="0" anchor="ctr"/>
           <a:lstStyle/>
           <a:p>
-            <a:pPr indent="0" marL="0">
+            <a:pPr marL="0" indent="0">
               <a:buNone/>
             </a:pPr>
             <a:r>
@@ -9257,6 +9625,13 @@
             <a:prstDash val="solid"/>
           </a:ln>
         </p:spPr>
+        <p:txBody>
+          <a:bodyPr/>
+          <a:lstStyle/>
+          <a:p>
+            <a:endParaRPr lang="en-GH"/>
+          </a:p>
+        </p:txBody>
       </p:sp>
       <p:sp>
         <p:nvSpPr>
@@ -9279,7 +9654,7 @@
           <a:bodyPr wrap="square" lIns="0" tIns="0" rIns="0" bIns="0" rtlCol="0" anchor="ctr"/>
           <a:lstStyle/>
           <a:p>
-            <a:pPr indent="0" marL="0">
+            <a:pPr marL="0" indent="0">
               <a:buNone/>
             </a:pPr>
             <a:r>
@@ -9315,7 +9690,7 @@
           <a:bodyPr wrap="square" lIns="0" tIns="0" rIns="0" bIns="0" rtlCol="0" anchor="ctr"/>
           <a:lstStyle/>
           <a:p>
-            <a:pPr indent="0" marL="0">
+            <a:pPr marL="0" indent="0">
               <a:buNone/>
             </a:pPr>
             <a:r>
@@ -9354,6 +9729,13 @@
             <a:prstDash val="solid"/>
           </a:ln>
         </p:spPr>
+        <p:txBody>
+          <a:bodyPr/>
+          <a:lstStyle/>
+          <a:p>
+            <a:endParaRPr lang="en-GH"/>
+          </a:p>
+        </p:txBody>
       </p:sp>
       <p:sp>
         <p:nvSpPr>
@@ -9376,7 +9758,7 @@
           <a:bodyPr wrap="square" lIns="0" tIns="0" rIns="0" bIns="0" rtlCol="0" anchor="ctr"/>
           <a:lstStyle/>
           <a:p>
-            <a:pPr indent="0" marL="0">
+            <a:pPr marL="0" indent="0">
               <a:buNone/>
             </a:pPr>
             <a:r>
@@ -9412,7 +9794,7 @@
           <a:bodyPr wrap="square" lIns="0" tIns="0" rIns="0" bIns="0" rtlCol="0" anchor="ctr"/>
           <a:lstStyle/>
           <a:p>
-            <a:pPr indent="0" marL="0">
+            <a:pPr marL="0" indent="0">
               <a:buNone/>
             </a:pPr>
             <a:r>
@@ -9451,6 +9833,13 @@
             <a:prstDash val="solid"/>
           </a:ln>
         </p:spPr>
+        <p:txBody>
+          <a:bodyPr/>
+          <a:lstStyle/>
+          <a:p>
+            <a:endParaRPr lang="en-GH"/>
+          </a:p>
+        </p:txBody>
       </p:sp>
       <p:sp>
         <p:nvSpPr>
@@ -9473,7 +9862,7 @@
           <a:bodyPr wrap="square" lIns="0" tIns="0" rIns="0" bIns="0" rtlCol="0" anchor="ctr"/>
           <a:lstStyle/>
           <a:p>
-            <a:pPr indent="0" marL="0">
+            <a:pPr marL="0" indent="0">
               <a:buNone/>
             </a:pPr>
             <a:r>
@@ -9509,7 +9898,7 @@
           <a:bodyPr wrap="square" lIns="0" tIns="0" rIns="0" bIns="0" rtlCol="0" anchor="ctr"/>
           <a:lstStyle/>
           <a:p>
-            <a:pPr indent="0" marL="0">
+            <a:pPr marL="0" indent="0">
               <a:buNone/>
             </a:pPr>
             <a:r>
@@ -9548,6 +9937,13 @@
             <a:prstDash val="solid"/>
           </a:ln>
         </p:spPr>
+        <p:txBody>
+          <a:bodyPr/>
+          <a:lstStyle/>
+          <a:p>
+            <a:endParaRPr lang="en-GH"/>
+          </a:p>
+        </p:txBody>
       </p:sp>
       <p:sp>
         <p:nvSpPr>
@@ -9570,7 +9966,7 @@
           <a:bodyPr wrap="square" lIns="0" tIns="0" rIns="0" bIns="0" rtlCol="0" anchor="ctr"/>
           <a:lstStyle/>
           <a:p>
-            <a:pPr indent="0" marL="0">
+            <a:pPr marL="0" indent="0">
               <a:buNone/>
             </a:pPr>
             <a:r>
@@ -9587,38 +9983,13 @@
       </p:sp>
       <p:sp>
         <p:nvSpPr>
-          <p:cNvPr id="27" name="Shape 25"/>
-          <p:cNvSpPr/>
-          <p:nvPr/>
-        </p:nvSpPr>
-        <p:spPr>
-          <a:xfrm>
-            <a:off x="365760" y="4617720"/>
-            <a:ext cx="8412480" cy="347472"/>
-          </a:xfrm>
-          <a:prstGeom prst="rect">
-            <a:avLst/>
-          </a:prstGeom>
-          <a:solidFill>
-            <a:srgbClr val="EBF5FB"/>
-          </a:solidFill>
-          <a:ln w="12700">
-            <a:solidFill>
-              <a:srgbClr val="2E86AB"/>
-            </a:solidFill>
-            <a:prstDash val="solid"/>
-          </a:ln>
-        </p:spPr>
-      </p:sp>
-      <p:sp>
-        <p:nvSpPr>
           <p:cNvPr id="28" name="Text 26"/>
           <p:cNvSpPr/>
           <p:nvPr/>
         </p:nvSpPr>
         <p:spPr>
           <a:xfrm>
-            <a:off x="457200" y="4617720"/>
+            <a:off x="457200" y="4756820"/>
             <a:ext cx="8229600" cy="347472"/>
           </a:xfrm>
           <a:prstGeom prst="rect">
@@ -9631,7 +10002,7 @@
           <a:bodyPr wrap="square" lIns="0" tIns="0" rIns="0" bIns="0" rtlCol="0" anchor="ctr"/>
           <a:lstStyle/>
           <a:p>
-            <a:pPr indent="0" marL="0">
+            <a:pPr marL="0" indent="0">
               <a:buNone/>
             </a:pPr>
             <a:r>
@@ -9662,6 +10033,7 @@
         <a:solidFill>
           <a:srgbClr val="F0F4F8"/>
         </a:solidFill>
+        <a:effectLst/>
       </p:bgPr>
     </p:bg>
     <p:spTree>
@@ -9699,7 +10071,7 @@
           <a:bodyPr wrap="square" lIns="0" tIns="0" rIns="0" bIns="0" rtlCol="0" anchor="ctr"/>
           <a:lstStyle/>
           <a:p>
-            <a:pPr indent="0" marL="0">
+            <a:pPr marL="0" indent="0">
               <a:buNone/>
             </a:pPr>
             <a:r>
@@ -9738,6 +10110,13 @@
             <a:prstDash val="solid"/>
           </a:ln>
         </p:spPr>
+        <p:txBody>
+          <a:bodyPr/>
+          <a:lstStyle/>
+          <a:p>
+            <a:endParaRPr lang="en-GH"/>
+          </a:p>
+        </p:txBody>
       </p:sp>
       <p:sp>
         <p:nvSpPr>
@@ -9760,7 +10139,7 @@
           <a:bodyPr wrap="square" lIns="0" tIns="0" rIns="0" bIns="0" rtlCol="0" anchor="ctr"/>
           <a:lstStyle/>
           <a:p>
-            <a:pPr indent="0" marL="0">
+            <a:pPr marL="0" indent="0">
               <a:buNone/>
             </a:pPr>
             <a:r>
@@ -9796,7 +10175,7 @@
           <a:bodyPr wrap="square" lIns="0" tIns="0" rIns="0" bIns="0" rtlCol="0" anchor="ctr"/>
           <a:lstStyle/>
           <a:p>
-            <a:pPr indent="0" marL="0">
+            <a:pPr marL="0" indent="0">
               <a:buNone/>
             </a:pPr>
             <a:r>
@@ -9832,7 +10211,7 @@
           <a:bodyPr wrap="square" lIns="0" tIns="0" rIns="0" bIns="0" rtlCol="0" anchor="ctr"/>
           <a:lstStyle/>
           <a:p>
-            <a:pPr indent="0" marL="0">
+            <a:pPr marL="0" indent="0">
               <a:buNone/>
             </a:pPr>
             <a:r>
@@ -9871,6 +10250,13 @@
             <a:prstDash val="solid"/>
           </a:ln>
         </p:spPr>
+        <p:txBody>
+          <a:bodyPr/>
+          <a:lstStyle/>
+          <a:p>
+            <a:endParaRPr lang="en-GH"/>
+          </a:p>
+        </p:txBody>
       </p:sp>
       <p:sp>
         <p:nvSpPr>
@@ -9893,7 +10279,7 @@
           <a:bodyPr wrap="square" lIns="0" tIns="0" rIns="0" bIns="0" rtlCol="0" anchor="ctr"/>
           <a:lstStyle/>
           <a:p>
-            <a:pPr indent="0" marL="0">
+            <a:pPr marL="0" indent="0">
               <a:buNone/>
             </a:pPr>
             <a:r>
@@ -9929,7 +10315,7 @@
           <a:bodyPr wrap="square" lIns="0" tIns="0" rIns="0" bIns="0" rtlCol="0" anchor="ctr"/>
           <a:lstStyle/>
           <a:p>
-            <a:pPr indent="0" marL="0">
+            <a:pPr marL="0" indent="0">
               <a:buNone/>
             </a:pPr>
             <a:r>
@@ -9965,7 +10351,7 @@
           <a:bodyPr wrap="square" lIns="0" tIns="0" rIns="0" bIns="0" rtlCol="0" anchor="ctr"/>
           <a:lstStyle/>
           <a:p>
-            <a:pPr indent="0" marL="0">
+            <a:pPr marL="0" indent="0">
               <a:buNone/>
             </a:pPr>
             <a:r>
@@ -10004,6 +10390,13 @@
             <a:prstDash val="solid"/>
           </a:ln>
         </p:spPr>
+        <p:txBody>
+          <a:bodyPr/>
+          <a:lstStyle/>
+          <a:p>
+            <a:endParaRPr lang="en-GH"/>
+          </a:p>
+        </p:txBody>
       </p:sp>
       <p:sp>
         <p:nvSpPr>
@@ -10026,7 +10419,7 @@
           <a:bodyPr wrap="square" lIns="0" tIns="0" rIns="0" bIns="0" rtlCol="0" anchor="ctr"/>
           <a:lstStyle/>
           <a:p>
-            <a:pPr indent="0" marL="0">
+            <a:pPr marL="0" indent="0">
               <a:buNone/>
             </a:pPr>
             <a:r>
@@ -10062,7 +10455,7 @@
           <a:bodyPr wrap="square" lIns="0" tIns="0" rIns="0" bIns="0" rtlCol="0" anchor="ctr"/>
           <a:lstStyle/>
           <a:p>
-            <a:pPr indent="0" marL="0">
+            <a:pPr marL="0" indent="0">
               <a:buNone/>
             </a:pPr>
             <a:r>
@@ -10098,7 +10491,7 @@
           <a:bodyPr wrap="square" lIns="0" tIns="0" rIns="0" bIns="0" rtlCol="0" anchor="ctr"/>
           <a:lstStyle/>
           <a:p>
-            <a:pPr indent="0" marL="0">
+            <a:pPr marL="0" indent="0">
               <a:buNone/>
             </a:pPr>
             <a:r>
@@ -10137,6 +10530,13 @@
             <a:prstDash val="solid"/>
           </a:ln>
         </p:spPr>
+        <p:txBody>
+          <a:bodyPr/>
+          <a:lstStyle/>
+          <a:p>
+            <a:endParaRPr lang="en-GH"/>
+          </a:p>
+        </p:txBody>
       </p:sp>
       <p:sp>
         <p:nvSpPr>
@@ -10159,7 +10559,7 @@
           <a:bodyPr wrap="square" lIns="0" tIns="0" rIns="0" bIns="0" rtlCol="0" anchor="ctr"/>
           <a:lstStyle/>
           <a:p>
-            <a:pPr indent="0" marL="0">
+            <a:pPr marL="0" indent="0">
               <a:buNone/>
             </a:pPr>
             <a:r>
@@ -10195,7 +10595,7 @@
           <a:bodyPr wrap="square" lIns="0" tIns="0" rIns="0" bIns="0" rtlCol="0" anchor="ctr"/>
           <a:lstStyle/>
           <a:p>
-            <a:pPr indent="0" marL="0">
+            <a:pPr marL="0" indent="0">
               <a:buNone/>
             </a:pPr>
             <a:r>
@@ -10231,7 +10631,7 @@
           <a:bodyPr wrap="square" lIns="0" tIns="0" rIns="0" bIns="0" rtlCol="0" anchor="ctr"/>
           <a:lstStyle/>
           <a:p>
-            <a:pPr indent="0" marL="0">
+            <a:pPr marL="0" indent="0">
               <a:buNone/>
             </a:pPr>
             <a:r>
@@ -10547,4 +10947,299 @@
     </a:ext>
   </a:extLst>
 </a:theme>
+</file>
+
+<file path=ppt/theme/theme2.xml><?xml version="1.0" encoding="utf-8"?>
+<a:theme xmlns:a="http://schemas.openxmlformats.org/drawingml/2006/main" name="Office Theme">
+  <a:themeElements>
+    <a:clrScheme name="Office">
+      <a:dk1>
+        <a:sysClr val="windowText" lastClr="000000"/>
+      </a:dk1>
+      <a:lt1>
+        <a:sysClr val="window" lastClr="FFFFFF"/>
+      </a:lt1>
+      <a:dk2>
+        <a:srgbClr val="44546A"/>
+      </a:dk2>
+      <a:lt2>
+        <a:srgbClr val="E7E6E6"/>
+      </a:lt2>
+      <a:accent1>
+        <a:srgbClr val="4472C4"/>
+      </a:accent1>
+      <a:accent2>
+        <a:srgbClr val="ED7D31"/>
+      </a:accent2>
+      <a:accent3>
+        <a:srgbClr val="A5A5A5"/>
+      </a:accent3>
+      <a:accent4>
+        <a:srgbClr val="FFC000"/>
+      </a:accent4>
+      <a:accent5>
+        <a:srgbClr val="5B9BD5"/>
+      </a:accent5>
+      <a:accent6>
+        <a:srgbClr val="70AD47"/>
+      </a:accent6>
+      <a:hlink>
+        <a:srgbClr val="0563C1"/>
+      </a:hlink>
+      <a:folHlink>
+        <a:srgbClr val="954F72"/>
+      </a:folHlink>
+    </a:clrScheme>
+    <a:fontScheme name="Office">
+      <a:majorFont>
+        <a:latin typeface="Calibri Light" panose="020F0302020204030204"/>
+        <a:ea typeface=""/>
+        <a:cs typeface=""/>
+        <a:font script="Jpan" typeface="游ゴシック Light"/>
+        <a:font script="Hang" typeface="맑은 고딕"/>
+        <a:font script="Hans" typeface="等线 Light"/>
+        <a:font script="Hant" typeface="新細明體"/>
+        <a:font script="Arab" typeface="Times New Roman"/>
+        <a:font script="Hebr" typeface="Times New Roman"/>
+        <a:font script="Thai" typeface="Angsana New"/>
+        <a:font script="Ethi" typeface="Nyala"/>
+        <a:font script="Beng" typeface="Vrinda"/>
+        <a:font script="Gujr" typeface="Shruti"/>
+        <a:font script="Khmr" typeface="MoolBoran"/>
+        <a:font script="Knda" typeface="Tunga"/>
+        <a:font script="Guru" typeface="Raavi"/>
+        <a:font script="Cans" typeface="Euphemia"/>
+        <a:font script="Cher" typeface="Plantagenet Cherokee"/>
+        <a:font script="Yiii" typeface="Microsoft Yi Baiti"/>
+        <a:font script="Tibt" typeface="Microsoft Himalaya"/>
+        <a:font script="Thaa" typeface="MV Boli"/>
+        <a:font script="Deva" typeface="Mangal"/>
+        <a:font script="Telu" typeface="Gautami"/>
+        <a:font script="Taml" typeface="Latha"/>
+        <a:font script="Syrc" typeface="Estrangelo Edessa"/>
+        <a:font script="Orya" typeface="Kalinga"/>
+        <a:font script="Mlym" typeface="Kartika"/>
+        <a:font script="Laoo" typeface="DokChampa"/>
+        <a:font script="Sinh" typeface="Iskoola Pota"/>
+        <a:font script="Mong" typeface="Mongolian Baiti"/>
+        <a:font script="Viet" typeface="Times New Roman"/>
+        <a:font script="Uigh" typeface="Microsoft Uighur"/>
+        <a:font script="Geor" typeface="Sylfaen"/>
+        <a:font script="Armn" typeface="Arial"/>
+        <a:font script="Bugi" typeface="Leelawadee UI"/>
+        <a:font script="Bopo" typeface="Microsoft JhengHei"/>
+        <a:font script="Java" typeface="Javanese Text"/>
+        <a:font script="Lisu" typeface="Segoe UI"/>
+        <a:font script="Mymr" typeface="Myanmar Text"/>
+        <a:font script="Nkoo" typeface="Ebrima"/>
+        <a:font script="Olck" typeface="Nirmala UI"/>
+        <a:font script="Osma" typeface="Ebrima"/>
+        <a:font script="Phag" typeface="Phagspa"/>
+        <a:font script="Syrn" typeface="Estrangelo Edessa"/>
+        <a:font script="Syrj" typeface="Estrangelo Edessa"/>
+        <a:font script="Syre" typeface="Estrangelo Edessa"/>
+        <a:font script="Sora" typeface="Nirmala UI"/>
+        <a:font script="Tale" typeface="Microsoft Tai Le"/>
+        <a:font script="Talu" typeface="Microsoft New Tai Lue"/>
+        <a:font script="Tfng" typeface="Ebrima"/>
+      </a:majorFont>
+      <a:minorFont>
+        <a:latin typeface="Calibri" panose="020F0502020204030204"/>
+        <a:ea typeface=""/>
+        <a:cs typeface=""/>
+        <a:font script="Jpan" typeface="游ゴシック"/>
+        <a:font script="Hang" typeface="맑은 고딕"/>
+        <a:font script="Hans" typeface="等线"/>
+        <a:font script="Hant" typeface="新細明體"/>
+        <a:font script="Arab" typeface="Arial"/>
+        <a:font script="Hebr" typeface="Arial"/>
+        <a:font script="Thai" typeface="Cordia New"/>
+        <a:font script="Ethi" typeface="Nyala"/>
+        <a:font script="Beng" typeface="Vrinda"/>
+        <a:font script="Gujr" typeface="Shruti"/>
+        <a:font script="Khmr" typeface="DaunPenh"/>
+        <a:font script="Knda" typeface="Tunga"/>
+        <a:font script="Guru" typeface="Raavi"/>
+        <a:font script="Cans" typeface="Euphemia"/>
+        <a:font script="Cher" typeface="Plantagenet Cherokee"/>
+        <a:font script="Yiii" typeface="Microsoft Yi Baiti"/>
+        <a:font script="Tibt" typeface="Microsoft Himalaya"/>
+        <a:font script="Thaa" typeface="MV Boli"/>
+        <a:font script="Deva" typeface="Mangal"/>
+        <a:font script="Telu" typeface="Gautami"/>
+        <a:font script="Taml" typeface="Latha"/>
+        <a:font script="Syrc" typeface="Estrangelo Edessa"/>
+        <a:font script="Orya" typeface="Kalinga"/>
+        <a:font script="Mlym" typeface="Kartika"/>
+        <a:font script="Laoo" typeface="DokChampa"/>
+        <a:font script="Sinh" typeface="Iskoola Pota"/>
+        <a:font script="Mong" typeface="Mongolian Baiti"/>
+        <a:font script="Viet" typeface="Arial"/>
+        <a:font script="Uigh" typeface="Microsoft Uighur"/>
+        <a:font script="Geor" typeface="Sylfaen"/>
+        <a:font script="Armn" typeface="Arial"/>
+        <a:font script="Bugi" typeface="Leelawadee UI"/>
+        <a:font script="Bopo" typeface="Microsoft JhengHei"/>
+        <a:font script="Java" typeface="Javanese Text"/>
+        <a:font script="Lisu" typeface="Segoe UI"/>
+        <a:font script="Mymr" typeface="Myanmar Text"/>
+        <a:font script="Nkoo" typeface="Ebrima"/>
+        <a:font script="Olck" typeface="Nirmala UI"/>
+        <a:font script="Osma" typeface="Ebrima"/>
+        <a:font script="Phag" typeface="Phagspa"/>
+        <a:font script="Syrn" typeface="Estrangelo Edessa"/>
+        <a:font script="Syrj" typeface="Estrangelo Edessa"/>
+        <a:font script="Syre" typeface="Estrangelo Edessa"/>
+        <a:font script="Sora" typeface="Nirmala UI"/>
+        <a:font script="Tale" typeface="Microsoft Tai Le"/>
+        <a:font script="Talu" typeface="Microsoft New Tai Lue"/>
+        <a:font script="Tfng" typeface="Ebrima"/>
+      </a:minorFont>
+    </a:fontScheme>
+    <a:fmtScheme name="Office">
+      <a:fillStyleLst>
+        <a:solidFill>
+          <a:schemeClr val="phClr"/>
+        </a:solidFill>
+        <a:gradFill rotWithShape="1">
+          <a:gsLst>
+            <a:gs pos="0">
+              <a:schemeClr val="phClr">
+                <a:lumMod val="110000"/>
+                <a:satMod val="105000"/>
+                <a:tint val="67000"/>
+              </a:schemeClr>
+            </a:gs>
+            <a:gs pos="50000">
+              <a:schemeClr val="phClr">
+                <a:lumMod val="105000"/>
+                <a:satMod val="103000"/>
+                <a:tint val="73000"/>
+              </a:schemeClr>
+            </a:gs>
+            <a:gs pos="100000">
+              <a:schemeClr val="phClr">
+                <a:lumMod val="105000"/>
+                <a:satMod val="109000"/>
+                <a:tint val="81000"/>
+              </a:schemeClr>
+            </a:gs>
+          </a:gsLst>
+          <a:lin ang="5400000" scaled="0"/>
+        </a:gradFill>
+        <a:gradFill rotWithShape="1">
+          <a:gsLst>
+            <a:gs pos="0">
+              <a:schemeClr val="phClr">
+                <a:satMod val="103000"/>
+                <a:lumMod val="102000"/>
+                <a:tint val="94000"/>
+              </a:schemeClr>
+            </a:gs>
+            <a:gs pos="50000">
+              <a:schemeClr val="phClr">
+                <a:satMod val="110000"/>
+                <a:lumMod val="100000"/>
+                <a:shade val="100000"/>
+              </a:schemeClr>
+            </a:gs>
+            <a:gs pos="100000">
+              <a:schemeClr val="phClr">
+                <a:lumMod val="99000"/>
+                <a:satMod val="120000"/>
+                <a:shade val="78000"/>
+              </a:schemeClr>
+            </a:gs>
+          </a:gsLst>
+          <a:lin ang="5400000" scaled="0"/>
+        </a:gradFill>
+      </a:fillStyleLst>
+      <a:lnStyleLst>
+        <a:ln w="6350" cap="flat" cmpd="sng" algn="ctr">
+          <a:solidFill>
+            <a:schemeClr val="phClr"/>
+          </a:solidFill>
+          <a:prstDash val="solid"/>
+          <a:miter lim="800000"/>
+        </a:ln>
+        <a:ln w="12700" cap="flat" cmpd="sng" algn="ctr">
+          <a:solidFill>
+            <a:schemeClr val="phClr"/>
+          </a:solidFill>
+          <a:prstDash val="solid"/>
+          <a:miter lim="800000"/>
+        </a:ln>
+        <a:ln w="19050" cap="flat" cmpd="sng" algn="ctr">
+          <a:solidFill>
+            <a:schemeClr val="phClr"/>
+          </a:solidFill>
+          <a:prstDash val="solid"/>
+          <a:miter lim="800000"/>
+        </a:ln>
+      </a:lnStyleLst>
+      <a:effectStyleLst>
+        <a:effectStyle>
+          <a:effectLst/>
+        </a:effectStyle>
+        <a:effectStyle>
+          <a:effectLst/>
+        </a:effectStyle>
+        <a:effectStyle>
+          <a:effectLst>
+            <a:outerShdw blurRad="57150" dist="19050" dir="5400000" algn="ctr" rotWithShape="0">
+              <a:srgbClr val="000000">
+                <a:alpha val="63000"/>
+              </a:srgbClr>
+            </a:outerShdw>
+          </a:effectLst>
+        </a:effectStyle>
+      </a:effectStyleLst>
+      <a:bgFillStyleLst>
+        <a:solidFill>
+          <a:schemeClr val="phClr"/>
+        </a:solidFill>
+        <a:solidFill>
+          <a:schemeClr val="phClr">
+            <a:tint val="95000"/>
+            <a:satMod val="170000"/>
+          </a:schemeClr>
+        </a:solidFill>
+        <a:gradFill rotWithShape="1">
+          <a:gsLst>
+            <a:gs pos="0">
+              <a:schemeClr val="phClr">
+                <a:tint val="93000"/>
+                <a:satMod val="150000"/>
+                <a:shade val="98000"/>
+                <a:lumMod val="102000"/>
+              </a:schemeClr>
+            </a:gs>
+            <a:gs pos="50000">
+              <a:schemeClr val="phClr">
+                <a:tint val="98000"/>
+                <a:satMod val="130000"/>
+                <a:shade val="90000"/>
+                <a:lumMod val="103000"/>
+              </a:schemeClr>
+            </a:gs>
+            <a:gs pos="100000">
+              <a:schemeClr val="phClr">
+                <a:shade val="63000"/>
+                <a:satMod val="120000"/>
+              </a:schemeClr>
+            </a:gs>
+          </a:gsLst>
+          <a:lin ang="5400000" scaled="0"/>
+        </a:gradFill>
+      </a:bgFillStyleLst>
+    </a:fmtScheme>
+  </a:themeElements>
+  <a:objectDefaults/>
+  <a:extraClrSchemeLst/>
+  <a:extLst>
+    <a:ext uri="{05A4C25C-085E-4340-85A3-A5531E510DB2}">
+      <thm15:themeFamily xmlns:thm15="http://schemas.microsoft.com/office/thememl/2012/main" name="Office Theme" id="{62F939B6-93AF-4DB8-9C6B-D6C7DFDC589F}" vid="{4A3C46E8-61CC-4603-A589-7422A47A8E4A}"/>
+    </a:ext>
+  </a:extLst>
+</a:theme>
 </file>